--- a/ppt/Spam Classifier.pptx
+++ b/ppt/Spam Classifier.pptx
@@ -1,26 +1,24 @@
 
 <file path=ppt/presentation.xml><?xml version="1.0" encoding="utf-8"?>
-<p:presentation xmlns:a="http://schemas.openxmlformats.org/drawingml/2006/main" xmlns:r="http://schemas.openxmlformats.org/officeDocument/2006/relationships" xmlns:p="http://schemas.openxmlformats.org/presentationml/2006/main" saveSubsetFonts="1">
+<p:presentation xmlns:a="http://schemas.openxmlformats.org/drawingml/2006/main" xmlns:r="http://schemas.openxmlformats.org/officeDocument/2006/relationships" xmlns:p="http://schemas.openxmlformats.org/presentationml/2006/main">
   <p:sldMasterIdLst>
-    <p:sldMasterId id="2147483660" r:id="rId1"/>
+    <p:sldMasterId id="2147483648" r:id="rId1"/>
   </p:sldMasterIdLst>
   <p:sldIdLst>
-    <p:sldId id="256" r:id="rId2"/>
-    <p:sldId id="264" r:id="rId3"/>
-    <p:sldId id="257" r:id="rId4"/>
-    <p:sldId id="265" r:id="rId5"/>
-    <p:sldId id="266" r:id="rId6"/>
-    <p:sldId id="259" r:id="rId7"/>
-    <p:sldId id="278" r:id="rId8"/>
-    <p:sldId id="277" r:id="rId9"/>
-    <p:sldId id="276" r:id="rId10"/>
-    <p:sldId id="275" r:id="rId11"/>
-    <p:sldId id="260" r:id="rId12"/>
+    <p:sldId id="256" r:id="rId3"/>
+    <p:sldId id="264" r:id="rId4"/>
+    <p:sldId id="257" r:id="rId5"/>
+    <p:sldId id="301" r:id="rId6"/>
+    <p:sldId id="302" r:id="rId7"/>
+    <p:sldId id="303" r:id="rId8"/>
+    <p:sldId id="288" r:id="rId9"/>
+    <p:sldId id="289" r:id="rId10"/>
+    <p:sldId id="266" r:id="rId11"/>
+    <p:sldId id="259" r:id="rId12"/>
     <p:sldId id="279" r:id="rId13"/>
-    <p:sldId id="280" r:id="rId14"/>
-    <p:sldId id="281" r:id="rId15"/>
+    <p:sldId id="260" r:id="rId14"/>
+    <p:sldId id="280" r:id="rId15"/>
     <p:sldId id="282" r:id="rId16"/>
-    <p:sldId id="283" r:id="rId17"/>
   </p:sldIdLst>
   <p:sldSz cx="12192000" cy="6858000"/>
   <p:notesSz cx="6858000" cy="9144000"/>
@@ -213,20 +211,7 @@
               </a:path>
             </a:pathLst>
           </a:custGeom>
-          <a:ln/>
           <a:effectLst/>
-          <a:extLst>
-            <a:ext uri="{91240B29-F687-4f45-9708-019B960494DF}">
-              <a14:hiddenLine xmlns:a14="http://schemas.microsoft.com/office/drawing/2010/main" xmlns="" w="9525">
-                <a:solidFill>
-                  <a:srgbClr val="000000"/>
-                </a:solidFill>
-                <a:round/>
-                <a:headEnd/>
-                <a:tailEnd/>
-              </a14:hiddenLine>
-            </a:ext>
-          </a:extLst>
         </p:spPr>
         <p:style>
           <a:lnRef idx="1">
@@ -409,7 +394,6 @@
           <a:p>
             <a:fld id="{D5107B96-A816-446C-A91E-A38A52054936}" type="datetimeFigureOut">
               <a:rPr lang="en-US" smtClean="0"/>
-              <a:t>7/28/2024</a:t>
             </a:fld>
             <a:endParaRPr lang="en-US"/>
           </a:p>
@@ -451,18 +435,12 @@
           <a:p>
             <a:fld id="{605EEB0D-0159-442E-924A-131153166082}" type="slidenum">
               <a:rPr lang="en-US" smtClean="0"/>
-              <a:t>‹#›</a:t>
             </a:fld>
             <a:endParaRPr lang="en-US"/>
           </a:p>
         </p:txBody>
       </p:sp>
     </p:spTree>
-    <p:extLst>
-      <p:ext uri="{BB962C8B-B14F-4D97-AF65-F5344CB8AC3E}">
-        <p14:creationId xmlns:p14="http://schemas.microsoft.com/office/powerpoint/2010/main" val="1810591246"/>
-      </p:ext>
-    </p:extLst>
   </p:cSld>
   <p:clrMapOvr>
     <a:masterClrMapping/>
@@ -622,9 +600,6 @@
         </p:style>
         <p:txBody>
           <a:bodyPr wrap="square" numCol="1" anchor="t" anchorCtr="0" compatLnSpc="1">
-            <a:prstTxWarp prst="textNoShape">
-              <a:avLst/>
-            </a:prstTxWarp>
             <a:normAutofit/>
           </a:bodyPr>
           <a:lstStyle>
@@ -707,6 +682,7 @@
               <a:rPr lang="en-US"/>
               <a:t>Click to edit Master text styles</a:t>
             </a:r>
+            <a:endParaRPr lang="en-US"/>
           </a:p>
         </p:txBody>
       </p:sp>
@@ -727,7 +703,6 @@
           <a:p>
             <a:fld id="{D5107B96-A816-446C-A91E-A38A52054936}" type="datetimeFigureOut">
               <a:rPr lang="en-US" smtClean="0"/>
-              <a:t>7/28/2024</a:t>
             </a:fld>
             <a:endParaRPr lang="en-US"/>
           </a:p>
@@ -769,18 +744,12 @@
           <a:p>
             <a:fld id="{605EEB0D-0159-442E-924A-131153166082}" type="slidenum">
               <a:rPr lang="en-US" smtClean="0"/>
-              <a:t>‹#›</a:t>
             </a:fld>
             <a:endParaRPr lang="en-US"/>
           </a:p>
         </p:txBody>
       </p:sp>
     </p:spTree>
-    <p:extLst>
-      <p:ext uri="{BB962C8B-B14F-4D97-AF65-F5344CB8AC3E}">
-        <p14:creationId xmlns:p14="http://schemas.microsoft.com/office/powerpoint/2010/main" val="3392162835"/>
-      </p:ext>
-    </p:extLst>
   </p:cSld>
   <p:clrMapOvr>
     <a:masterClrMapping/>
@@ -1161,6 +1130,7 @@
               <a:rPr lang="en-US"/>
               <a:t>Click to edit Master text styles</a:t>
             </a:r>
+            <a:endParaRPr lang="en-US"/>
           </a:p>
         </p:txBody>
       </p:sp>
@@ -1195,6 +1165,7 @@
               <a:rPr lang="en-US"/>
               <a:t>Click to edit Master text styles</a:t>
             </a:r>
+            <a:endParaRPr lang="en-US"/>
           </a:p>
         </p:txBody>
       </p:sp>
@@ -1215,7 +1186,6 @@
           <a:p>
             <a:fld id="{D5107B96-A816-446C-A91E-A38A52054936}" type="datetimeFigureOut">
               <a:rPr lang="en-US" smtClean="0"/>
-              <a:t>7/28/2024</a:t>
             </a:fld>
             <a:endParaRPr lang="en-US"/>
           </a:p>
@@ -1257,18 +1227,12 @@
           <a:p>
             <a:fld id="{605EEB0D-0159-442E-924A-131153166082}" type="slidenum">
               <a:rPr lang="en-US" smtClean="0"/>
-              <a:t>‹#›</a:t>
             </a:fld>
             <a:endParaRPr lang="en-US"/>
           </a:p>
         </p:txBody>
       </p:sp>
     </p:spTree>
-    <p:extLst>
-      <p:ext uri="{BB962C8B-B14F-4D97-AF65-F5344CB8AC3E}">
-        <p14:creationId xmlns:p14="http://schemas.microsoft.com/office/powerpoint/2010/main" val="3764625497"/>
-      </p:ext>
-    </p:extLst>
   </p:cSld>
   <p:clrMapOvr>
     <a:masterClrMapping/>
@@ -1564,6 +1528,7 @@
               <a:rPr lang="en-US"/>
               <a:t>Click to edit Master text styles</a:t>
             </a:r>
+            <a:endParaRPr lang="en-US"/>
           </a:p>
         </p:txBody>
       </p:sp>
@@ -1584,7 +1549,6 @@
           <a:p>
             <a:fld id="{D5107B96-A816-446C-A91E-A38A52054936}" type="datetimeFigureOut">
               <a:rPr lang="en-US" smtClean="0"/>
-              <a:t>7/28/2024</a:t>
             </a:fld>
             <a:endParaRPr lang="en-US"/>
           </a:p>
@@ -1626,18 +1590,12 @@
           <a:p>
             <a:fld id="{605EEB0D-0159-442E-924A-131153166082}" type="slidenum">
               <a:rPr lang="en-US" smtClean="0"/>
-              <a:t>‹#›</a:t>
             </a:fld>
             <a:endParaRPr lang="en-US"/>
           </a:p>
         </p:txBody>
       </p:sp>
     </p:spTree>
-    <p:extLst>
-      <p:ext uri="{BB962C8B-B14F-4D97-AF65-F5344CB8AC3E}">
-        <p14:creationId xmlns:p14="http://schemas.microsoft.com/office/powerpoint/2010/main" val="835286219"/>
-      </p:ext>
-    </p:extLst>
   </p:cSld>
   <p:clrMapOvr>
     <a:masterClrMapping/>
@@ -1736,19 +1694,6 @@
               </a:path>
             </a:pathLst>
           </a:custGeom>
-          <a:ln/>
-          <a:extLst>
-            <a:ext uri="{91240B29-F687-4f45-9708-019B960494DF}">
-              <a14:hiddenLine xmlns:a14="http://schemas.microsoft.com/office/drawing/2010/main" xmlns="" w="9525">
-                <a:solidFill>
-                  <a:srgbClr val="000000"/>
-                </a:solidFill>
-                <a:round/>
-                <a:headEnd/>
-                <a:tailEnd/>
-              </a14:hiddenLine>
-            </a:ext>
-          </a:extLst>
         </p:spPr>
         <p:style>
           <a:lnRef idx="1">
@@ -1808,6 +1753,7 @@
               <a:rPr lang="en-US"/>
               <a:t>Click to edit Master text styles</a:t>
             </a:r>
+            <a:endParaRPr lang="en-US"/>
           </a:p>
           <a:p>
             <a:pPr lvl="1"/>
@@ -1815,6 +1761,7 @@
               <a:rPr lang="en-US"/>
               <a:t>Second level</a:t>
             </a:r>
+            <a:endParaRPr lang="en-US"/>
           </a:p>
           <a:p>
             <a:pPr lvl="2"/>
@@ -1822,6 +1769,7 @@
               <a:rPr lang="en-US"/>
               <a:t>Third level</a:t>
             </a:r>
+            <a:endParaRPr lang="en-US"/>
           </a:p>
           <a:p>
             <a:pPr lvl="3"/>
@@ -1829,6 +1777,7 @@
               <a:rPr lang="en-US"/>
               <a:t>Fourth level</a:t>
             </a:r>
+            <a:endParaRPr lang="en-US"/>
           </a:p>
           <a:p>
             <a:pPr lvl="4"/>
@@ -1857,7 +1806,6 @@
           <a:p>
             <a:fld id="{D5107B96-A816-446C-A91E-A38A52054936}" type="datetimeFigureOut">
               <a:rPr lang="en-US" smtClean="0"/>
-              <a:t>7/28/2024</a:t>
             </a:fld>
             <a:endParaRPr lang="en-US"/>
           </a:p>
@@ -1899,18 +1847,12 @@
           <a:p>
             <a:fld id="{605EEB0D-0159-442E-924A-131153166082}" type="slidenum">
               <a:rPr lang="en-US" smtClean="0"/>
-              <a:t>‹#›</a:t>
             </a:fld>
             <a:endParaRPr lang="en-US"/>
           </a:p>
         </p:txBody>
       </p:sp>
     </p:spTree>
-    <p:extLst>
-      <p:ext uri="{BB962C8B-B14F-4D97-AF65-F5344CB8AC3E}">
-        <p14:creationId xmlns:p14="http://schemas.microsoft.com/office/powerpoint/2010/main" val="738091158"/>
-      </p:ext>
-    </p:extLst>
   </p:cSld>
   <p:clrMapOvr>
     <a:masterClrMapping/>
@@ -2011,19 +1953,6 @@
               </a:path>
             </a:pathLst>
           </a:custGeom>
-          <a:ln/>
-          <a:extLst>
-            <a:ext uri="{91240B29-F687-4f45-9708-019B960494DF}">
-              <a14:hiddenLine xmlns:a14="http://schemas.microsoft.com/office/drawing/2010/main" xmlns="" w="9525">
-                <a:solidFill>
-                  <a:srgbClr val="000000"/>
-                </a:solidFill>
-                <a:round/>
-                <a:headEnd/>
-                <a:tailEnd/>
-              </a14:hiddenLine>
-            </a:ext>
-          </a:extLst>
         </p:spPr>
         <p:style>
           <a:lnRef idx="1">
@@ -2093,6 +2022,7 @@
               <a:rPr lang="en-US"/>
               <a:t>Click to edit Master text styles</a:t>
             </a:r>
+            <a:endParaRPr lang="en-US"/>
           </a:p>
           <a:p>
             <a:pPr lvl="1"/>
@@ -2100,6 +2030,7 @@
               <a:rPr lang="en-US"/>
               <a:t>Second level</a:t>
             </a:r>
+            <a:endParaRPr lang="en-US"/>
           </a:p>
           <a:p>
             <a:pPr lvl="2"/>
@@ -2107,6 +2038,7 @@
               <a:rPr lang="en-US"/>
               <a:t>Third level</a:t>
             </a:r>
+            <a:endParaRPr lang="en-US"/>
           </a:p>
           <a:p>
             <a:pPr lvl="3"/>
@@ -2114,6 +2046,7 @@
               <a:rPr lang="en-US"/>
               <a:t>Fourth level</a:t>
             </a:r>
+            <a:endParaRPr lang="en-US"/>
           </a:p>
           <a:p>
             <a:pPr lvl="4"/>
@@ -2142,7 +2075,6 @@
           <a:p>
             <a:fld id="{D5107B96-A816-446C-A91E-A38A52054936}" type="datetimeFigureOut">
               <a:rPr lang="en-US" smtClean="0"/>
-              <a:t>7/28/2024</a:t>
             </a:fld>
             <a:endParaRPr lang="en-US"/>
           </a:p>
@@ -2184,18 +2116,179 @@
           <a:p>
             <a:fld id="{605EEB0D-0159-442E-924A-131153166082}" type="slidenum">
               <a:rPr lang="en-US" smtClean="0"/>
-              <a:t>‹#›</a:t>
             </a:fld>
             <a:endParaRPr lang="en-US"/>
           </a:p>
         </p:txBody>
       </p:sp>
     </p:spTree>
-    <p:extLst>
-      <p:ext uri="{BB962C8B-B14F-4D97-AF65-F5344CB8AC3E}">
-        <p14:creationId xmlns:p14="http://schemas.microsoft.com/office/powerpoint/2010/main" val="771956154"/>
-      </p:ext>
-    </p:extLst>
+  </p:cSld>
+  <p:clrMapOvr>
+    <a:masterClrMapping/>
+  </p:clrMapOvr>
+</p:sldLayout>
+</file>
+
+<file path=ppt/slideLayouts/slideLayout15.xml><?xml version="1.0" encoding="utf-8"?>
+<p:sldLayout xmlns:a="http://schemas.openxmlformats.org/drawingml/2006/main" xmlns:r="http://schemas.openxmlformats.org/officeDocument/2006/relationships" xmlns:p="http://schemas.openxmlformats.org/presentationml/2006/main" type="tx" preserve="1">
+  <p:cSld name="Title and Text">
+    <p:spTree>
+      <p:nvGrpSpPr>
+        <p:cNvPr id="1" name=""/>
+        <p:cNvGrpSpPr/>
+        <p:nvPr/>
+      </p:nvGrpSpPr>
+      <p:grpSpPr>
+        <a:xfrm>
+          <a:off x="0" y="0"/>
+          <a:ext cx="0" cy="0"/>
+          <a:chOff x="0" y="0"/>
+          <a:chExt cx="0" cy="0"/>
+        </a:xfrm>
+      </p:grpSpPr>
+      <p:sp>
+        <p:nvSpPr>
+          <p:cNvPr id="2" name="Title 1"/>
+          <p:cNvSpPr>
+            <a:spLocks noGrp="1"/>
+          </p:cNvSpPr>
+          <p:nvPr>
+            <p:ph type="title"/>
+          </p:nvPr>
+        </p:nvSpPr>
+        <p:spPr/>
+        <p:txBody>
+          <a:bodyPr/>
+          <a:lstStyle/>
+          <a:p>
+            <a:r>
+              <a:rPr lang="en-US" smtClean="0"/>
+              <a:t>Click to edit Master title style</a:t>
+            </a:r>
+            <a:endParaRPr lang="en-US"/>
+          </a:p>
+        </p:txBody>
+      </p:sp>
+      <p:sp>
+        <p:nvSpPr>
+          <p:cNvPr id="3" name="Text Placeholder 2"/>
+          <p:cNvSpPr>
+            <a:spLocks noGrp="1"/>
+          </p:cNvSpPr>
+          <p:nvPr>
+            <p:ph type="body" idx="1"/>
+          </p:nvPr>
+        </p:nvSpPr>
+        <p:spPr/>
+        <p:txBody>
+          <a:bodyPr/>
+          <a:lstStyle/>
+          <a:p>
+            <a:pPr lvl="0"/>
+            <a:r>
+              <a:rPr lang="en-US" smtClean="0"/>
+              <a:t>Click to edit Master text styles</a:t>
+            </a:r>
+            <a:endParaRPr lang="en-US" smtClean="0"/>
+          </a:p>
+          <a:p>
+            <a:pPr lvl="1"/>
+            <a:r>
+              <a:rPr lang="en-US" smtClean="0"/>
+              <a:t>Second level</a:t>
+            </a:r>
+            <a:endParaRPr lang="en-US" smtClean="0"/>
+          </a:p>
+          <a:p>
+            <a:pPr lvl="2"/>
+            <a:r>
+              <a:rPr lang="en-US" smtClean="0"/>
+              <a:t>Third level</a:t>
+            </a:r>
+            <a:endParaRPr lang="en-US" smtClean="0"/>
+          </a:p>
+          <a:p>
+            <a:pPr lvl="3"/>
+            <a:r>
+              <a:rPr lang="en-US" smtClean="0"/>
+              <a:t>Fourth level</a:t>
+            </a:r>
+            <a:endParaRPr lang="en-US" smtClean="0"/>
+          </a:p>
+          <a:p>
+            <a:pPr lvl="4"/>
+            <a:r>
+              <a:rPr lang="en-US" smtClean="0"/>
+              <a:t>Fifth level</a:t>
+            </a:r>
+            <a:endParaRPr lang="en-US"/>
+          </a:p>
+        </p:txBody>
+      </p:sp>
+      <p:sp>
+        <p:nvSpPr>
+          <p:cNvPr id="4" name="Date Placeholder 3"/>
+          <p:cNvSpPr>
+            <a:spLocks noGrp="1"/>
+          </p:cNvSpPr>
+          <p:nvPr>
+            <p:ph type="dt" sz="half" idx="10"/>
+          </p:nvPr>
+        </p:nvSpPr>
+        <p:spPr/>
+        <p:txBody>
+          <a:bodyPr/>
+          <a:lstStyle/>
+          <a:p>
+            <a:fld id="{D5107B96-A816-446C-A91E-A38A52054936}" type="datetimeFigureOut">
+              <a:rPr lang="en-US" smtClean="0"/>
+            </a:fld>
+            <a:endParaRPr lang="en-US"/>
+          </a:p>
+        </p:txBody>
+      </p:sp>
+      <p:sp>
+        <p:nvSpPr>
+          <p:cNvPr id="5" name="Footer Placeholder 4"/>
+          <p:cNvSpPr>
+            <a:spLocks noGrp="1"/>
+          </p:cNvSpPr>
+          <p:nvPr>
+            <p:ph type="ftr" sz="quarter" idx="11"/>
+          </p:nvPr>
+        </p:nvSpPr>
+        <p:spPr/>
+        <p:txBody>
+          <a:bodyPr/>
+          <a:lstStyle/>
+          <a:p>
+            <a:endParaRPr lang="en-US"/>
+          </a:p>
+        </p:txBody>
+      </p:sp>
+      <p:sp>
+        <p:nvSpPr>
+          <p:cNvPr id="6" name="Slide Number Placeholder 5"/>
+          <p:cNvSpPr>
+            <a:spLocks noGrp="1"/>
+          </p:cNvSpPr>
+          <p:nvPr>
+            <p:ph type="sldNum" sz="quarter" idx="12"/>
+          </p:nvPr>
+        </p:nvSpPr>
+        <p:spPr/>
+        <p:txBody>
+          <a:bodyPr/>
+          <a:lstStyle/>
+          <a:p>
+            <a:fld id="{605EEB0D-0159-442E-924A-131153166082}" type="slidenum">
+              <a:rPr lang="en-US" smtClean="0"/>
+            </a:fld>
+            <a:endParaRPr lang="en-US"/>
+          </a:p>
+        </p:txBody>
+      </p:sp>
+    </p:spTree>
   </p:cSld>
   <p:clrMapOvr>
     <a:masterClrMapping/>
@@ -2294,19 +2387,6 @@
               </a:path>
             </a:pathLst>
           </a:custGeom>
-          <a:ln/>
-          <a:extLst>
-            <a:ext uri="{91240B29-F687-4f45-9708-019B960494DF}">
-              <a14:hiddenLine xmlns:a14="http://schemas.microsoft.com/office/drawing/2010/main" xmlns="" w="9525">
-                <a:solidFill>
-                  <a:srgbClr val="000000"/>
-                </a:solidFill>
-                <a:round/>
-                <a:headEnd/>
-                <a:tailEnd/>
-              </a14:hiddenLine>
-            </a:ext>
-          </a:extLst>
         </p:spPr>
         <p:style>
           <a:lnRef idx="1">
@@ -2376,6 +2456,7 @@
               <a:rPr lang="en-US"/>
               <a:t>Click to edit Master text styles</a:t>
             </a:r>
+            <a:endParaRPr lang="en-US"/>
           </a:p>
           <a:p>
             <a:pPr lvl="1"/>
@@ -2383,6 +2464,7 @@
               <a:rPr lang="en-US"/>
               <a:t>Second level</a:t>
             </a:r>
+            <a:endParaRPr lang="en-US"/>
           </a:p>
           <a:p>
             <a:pPr lvl="2"/>
@@ -2390,6 +2472,7 @@
               <a:rPr lang="en-US"/>
               <a:t>Third level</a:t>
             </a:r>
+            <a:endParaRPr lang="en-US"/>
           </a:p>
           <a:p>
             <a:pPr lvl="3"/>
@@ -2397,6 +2480,7 @@
               <a:rPr lang="en-US"/>
               <a:t>Fourth level</a:t>
             </a:r>
+            <a:endParaRPr lang="en-US"/>
           </a:p>
           <a:p>
             <a:pPr lvl="4"/>
@@ -2425,7 +2509,6 @@
           <a:p>
             <a:fld id="{D5107B96-A816-446C-A91E-A38A52054936}" type="datetimeFigureOut">
               <a:rPr lang="en-US" smtClean="0"/>
-              <a:t>7/28/2024</a:t>
             </a:fld>
             <a:endParaRPr lang="en-US"/>
           </a:p>
@@ -2467,18 +2550,12 @@
           <a:p>
             <a:fld id="{605EEB0D-0159-442E-924A-131153166082}" type="slidenum">
               <a:rPr lang="en-US" smtClean="0"/>
-              <a:t>‹#›</a:t>
             </a:fld>
             <a:endParaRPr lang="en-US"/>
           </a:p>
         </p:txBody>
       </p:sp>
     </p:spTree>
-    <p:extLst>
-      <p:ext uri="{BB962C8B-B14F-4D97-AF65-F5344CB8AC3E}">
-        <p14:creationId xmlns:p14="http://schemas.microsoft.com/office/powerpoint/2010/main" val="2275954992"/>
-      </p:ext>
-    </p:extLst>
   </p:cSld>
   <p:clrMapOvr>
     <a:masterClrMapping/>
@@ -2580,10 +2657,6 @@
               </a:path>
             </a:pathLst>
           </a:custGeom>
-          <a:ln>
-            <a:headEnd/>
-            <a:tailEnd/>
-          </a:ln>
         </p:spPr>
         <p:style>
           <a:lnRef idx="1">
@@ -2748,6 +2821,7 @@
               <a:rPr lang="en-US"/>
               <a:t>Click to edit Master text styles</a:t>
             </a:r>
+            <a:endParaRPr lang="en-US"/>
           </a:p>
         </p:txBody>
       </p:sp>
@@ -2768,7 +2842,6 @@
           <a:p>
             <a:fld id="{D5107B96-A816-446C-A91E-A38A52054936}" type="datetimeFigureOut">
               <a:rPr lang="en-US" smtClean="0"/>
-              <a:t>7/28/2024</a:t>
             </a:fld>
             <a:endParaRPr lang="en-US"/>
           </a:p>
@@ -2810,18 +2883,12 @@
           <a:p>
             <a:fld id="{605EEB0D-0159-442E-924A-131153166082}" type="slidenum">
               <a:rPr lang="en-US" smtClean="0"/>
-              <a:t>‹#›</a:t>
             </a:fld>
             <a:endParaRPr lang="en-US"/>
           </a:p>
         </p:txBody>
       </p:sp>
     </p:spTree>
-    <p:extLst>
-      <p:ext uri="{BB962C8B-B14F-4D97-AF65-F5344CB8AC3E}">
-        <p14:creationId xmlns:p14="http://schemas.microsoft.com/office/powerpoint/2010/main" val="2285840052"/>
-      </p:ext>
-    </p:extLst>
   </p:cSld>
   <p:clrMapOvr>
     <a:masterClrMapping/>
@@ -2920,19 +2987,6 @@
               </a:path>
             </a:pathLst>
           </a:custGeom>
-          <a:ln/>
-          <a:extLst>
-            <a:ext uri="{91240B29-F687-4f45-9708-019B960494DF}">
-              <a14:hiddenLine xmlns:a14="http://schemas.microsoft.com/office/drawing/2010/main" xmlns="" w="9525">
-                <a:solidFill>
-                  <a:srgbClr val="000000"/>
-                </a:solidFill>
-                <a:round/>
-                <a:headEnd/>
-                <a:tailEnd/>
-              </a14:hiddenLine>
-            </a:ext>
-          </a:extLst>
         </p:spPr>
         <p:style>
           <a:lnRef idx="1">
@@ -2999,6 +3053,7 @@
               <a:rPr lang="en-US"/>
               <a:t>Click to edit Master text styles</a:t>
             </a:r>
+            <a:endParaRPr lang="en-US"/>
           </a:p>
           <a:p>
             <a:pPr lvl="1"/>
@@ -3006,6 +3061,7 @@
               <a:rPr lang="en-US"/>
               <a:t>Second level</a:t>
             </a:r>
+            <a:endParaRPr lang="en-US"/>
           </a:p>
           <a:p>
             <a:pPr lvl="2"/>
@@ -3013,6 +3069,7 @@
               <a:rPr lang="en-US"/>
               <a:t>Third level</a:t>
             </a:r>
+            <a:endParaRPr lang="en-US"/>
           </a:p>
           <a:p>
             <a:pPr lvl="3"/>
@@ -3020,6 +3077,7 @@
               <a:rPr lang="en-US"/>
               <a:t>Fourth level</a:t>
             </a:r>
+            <a:endParaRPr lang="en-US"/>
           </a:p>
           <a:p>
             <a:pPr lvl="4"/>
@@ -3058,6 +3116,7 @@
               <a:rPr lang="en-US"/>
               <a:t>Click to edit Master text styles</a:t>
             </a:r>
+            <a:endParaRPr lang="en-US"/>
           </a:p>
           <a:p>
             <a:pPr lvl="1"/>
@@ -3065,6 +3124,7 @@
               <a:rPr lang="en-US"/>
               <a:t>Second level</a:t>
             </a:r>
+            <a:endParaRPr lang="en-US"/>
           </a:p>
           <a:p>
             <a:pPr lvl="2"/>
@@ -3072,6 +3132,7 @@
               <a:rPr lang="en-US"/>
               <a:t>Third level</a:t>
             </a:r>
+            <a:endParaRPr lang="en-US"/>
           </a:p>
           <a:p>
             <a:pPr lvl="3"/>
@@ -3079,6 +3140,7 @@
               <a:rPr lang="en-US"/>
               <a:t>Fourth level</a:t>
             </a:r>
+            <a:endParaRPr lang="en-US"/>
           </a:p>
           <a:p>
             <a:pPr lvl="4"/>
@@ -3107,7 +3169,6 @@
           <a:p>
             <a:fld id="{D5107B96-A816-446C-A91E-A38A52054936}" type="datetimeFigureOut">
               <a:rPr lang="en-US" smtClean="0"/>
-              <a:t>7/28/2024</a:t>
             </a:fld>
             <a:endParaRPr lang="en-US"/>
           </a:p>
@@ -3149,18 +3210,12 @@
           <a:p>
             <a:fld id="{605EEB0D-0159-442E-924A-131153166082}" type="slidenum">
               <a:rPr lang="en-US" smtClean="0"/>
-              <a:t>‹#›</a:t>
             </a:fld>
             <a:endParaRPr lang="en-US"/>
           </a:p>
         </p:txBody>
       </p:sp>
     </p:spTree>
-    <p:extLst>
-      <p:ext uri="{BB962C8B-B14F-4D97-AF65-F5344CB8AC3E}">
-        <p14:creationId xmlns:p14="http://schemas.microsoft.com/office/powerpoint/2010/main" val="1088893814"/>
-      </p:ext>
-    </p:extLst>
   </p:cSld>
   <p:clrMapOvr>
     <a:masterClrMapping/>
@@ -3259,19 +3314,6 @@
               </a:path>
             </a:pathLst>
           </a:custGeom>
-          <a:ln/>
-          <a:extLst>
-            <a:ext uri="{91240B29-F687-4f45-9708-019B960494DF}">
-              <a14:hiddenLine xmlns:a14="http://schemas.microsoft.com/office/drawing/2010/main" xmlns="" w="9525">
-                <a:solidFill>
-                  <a:srgbClr val="000000"/>
-                </a:solidFill>
-                <a:round/>
-                <a:headEnd/>
-                <a:tailEnd/>
-              </a14:hiddenLine>
-            </a:ext>
-          </a:extLst>
         </p:spPr>
         <p:style>
           <a:lnRef idx="1">
@@ -3379,6 +3421,7 @@
               <a:rPr lang="en-US"/>
               <a:t>Click to edit Master text styles</a:t>
             </a:r>
+            <a:endParaRPr lang="en-US"/>
           </a:p>
         </p:txBody>
       </p:sp>
@@ -3409,6 +3452,7 @@
               <a:rPr lang="en-US"/>
               <a:t>Click to edit Master text styles</a:t>
             </a:r>
+            <a:endParaRPr lang="en-US"/>
           </a:p>
           <a:p>
             <a:pPr lvl="1"/>
@@ -3416,6 +3460,7 @@
               <a:rPr lang="en-US"/>
               <a:t>Second level</a:t>
             </a:r>
+            <a:endParaRPr lang="en-US"/>
           </a:p>
           <a:p>
             <a:pPr lvl="2"/>
@@ -3423,6 +3468,7 @@
               <a:rPr lang="en-US"/>
               <a:t>Third level</a:t>
             </a:r>
+            <a:endParaRPr lang="en-US"/>
           </a:p>
           <a:p>
             <a:pPr lvl="3"/>
@@ -3430,6 +3476,7 @@
               <a:rPr lang="en-US"/>
               <a:t>Fourth level</a:t>
             </a:r>
+            <a:endParaRPr lang="en-US"/>
           </a:p>
           <a:p>
             <a:pPr lvl="4"/>
@@ -3505,6 +3552,7 @@
               <a:rPr lang="en-US"/>
               <a:t>Click to edit Master text styles</a:t>
             </a:r>
+            <a:endParaRPr lang="en-US"/>
           </a:p>
         </p:txBody>
       </p:sp>
@@ -3535,6 +3583,7 @@
               <a:rPr lang="en-US"/>
               <a:t>Click to edit Master text styles</a:t>
             </a:r>
+            <a:endParaRPr lang="en-US"/>
           </a:p>
           <a:p>
             <a:pPr lvl="1"/>
@@ -3542,6 +3591,7 @@
               <a:rPr lang="en-US"/>
               <a:t>Second level</a:t>
             </a:r>
+            <a:endParaRPr lang="en-US"/>
           </a:p>
           <a:p>
             <a:pPr lvl="2"/>
@@ -3549,6 +3599,7 @@
               <a:rPr lang="en-US"/>
               <a:t>Third level</a:t>
             </a:r>
+            <a:endParaRPr lang="en-US"/>
           </a:p>
           <a:p>
             <a:pPr lvl="3"/>
@@ -3556,6 +3607,7 @@
               <a:rPr lang="en-US"/>
               <a:t>Fourth level</a:t>
             </a:r>
+            <a:endParaRPr lang="en-US"/>
           </a:p>
           <a:p>
             <a:pPr lvl="4"/>
@@ -3584,7 +3636,6 @@
           <a:p>
             <a:fld id="{D5107B96-A816-446C-A91E-A38A52054936}" type="datetimeFigureOut">
               <a:rPr lang="en-US" smtClean="0"/>
-              <a:t>7/28/2024</a:t>
             </a:fld>
             <a:endParaRPr lang="en-US"/>
           </a:p>
@@ -3626,18 +3677,12 @@
           <a:p>
             <a:fld id="{605EEB0D-0159-442E-924A-131153166082}" type="slidenum">
               <a:rPr lang="en-US" smtClean="0"/>
-              <a:t>‹#›</a:t>
             </a:fld>
             <a:endParaRPr lang="en-US"/>
           </a:p>
         </p:txBody>
       </p:sp>
     </p:spTree>
-    <p:extLst>
-      <p:ext uri="{BB962C8B-B14F-4D97-AF65-F5344CB8AC3E}">
-        <p14:creationId xmlns:p14="http://schemas.microsoft.com/office/powerpoint/2010/main" val="3115104567"/>
-      </p:ext>
-    </p:extLst>
   </p:cSld>
   <p:clrMapOvr>
     <a:masterClrMapping/>
@@ -3736,19 +3781,6 @@
               </a:path>
             </a:pathLst>
           </a:custGeom>
-          <a:ln/>
-          <a:extLst>
-            <a:ext uri="{91240B29-F687-4f45-9708-019B960494DF}">
-              <a14:hiddenLine xmlns:a14="http://schemas.microsoft.com/office/drawing/2010/main" xmlns="" w="9525">
-                <a:solidFill>
-                  <a:srgbClr val="000000"/>
-                </a:solidFill>
-                <a:round/>
-                <a:headEnd/>
-                <a:tailEnd/>
-              </a14:hiddenLine>
-            </a:ext>
-          </a:extLst>
         </p:spPr>
         <p:style>
           <a:lnRef idx="1">
@@ -3805,7 +3837,6 @@
           <a:p>
             <a:fld id="{D5107B96-A816-446C-A91E-A38A52054936}" type="datetimeFigureOut">
               <a:rPr lang="en-US" smtClean="0"/>
-              <a:t>7/28/2024</a:t>
             </a:fld>
             <a:endParaRPr lang="en-US"/>
           </a:p>
@@ -3847,18 +3878,12 @@
           <a:p>
             <a:fld id="{605EEB0D-0159-442E-924A-131153166082}" type="slidenum">
               <a:rPr lang="en-US" smtClean="0"/>
-              <a:t>‹#›</a:t>
             </a:fld>
             <a:endParaRPr lang="en-US"/>
           </a:p>
         </p:txBody>
       </p:sp>
     </p:spTree>
-    <p:extLst>
-      <p:ext uri="{BB962C8B-B14F-4D97-AF65-F5344CB8AC3E}">
-        <p14:creationId xmlns:p14="http://schemas.microsoft.com/office/powerpoint/2010/main" val="672186015"/>
-      </p:ext>
-    </p:extLst>
   </p:cSld>
   <p:clrMapOvr>
     <a:masterClrMapping/>
@@ -3900,7 +3925,6 @@
           <a:p>
             <a:fld id="{D5107B96-A816-446C-A91E-A38A52054936}" type="datetimeFigureOut">
               <a:rPr lang="en-US" smtClean="0"/>
-              <a:t>7/28/2024</a:t>
             </a:fld>
             <a:endParaRPr lang="en-US"/>
           </a:p>
@@ -3942,18 +3966,12 @@
           <a:p>
             <a:fld id="{605EEB0D-0159-442E-924A-131153166082}" type="slidenum">
               <a:rPr lang="en-US" smtClean="0"/>
-              <a:t>‹#›</a:t>
             </a:fld>
             <a:endParaRPr lang="en-US"/>
           </a:p>
         </p:txBody>
       </p:sp>
     </p:spTree>
-    <p:extLst>
-      <p:ext uri="{BB962C8B-B14F-4D97-AF65-F5344CB8AC3E}">
-        <p14:creationId xmlns:p14="http://schemas.microsoft.com/office/powerpoint/2010/main" val="3051087337"/>
-      </p:ext>
-    </p:extLst>
   </p:cSld>
   <p:clrMapOvr>
     <a:masterClrMapping/>
@@ -4165,19 +4183,6 @@
               </a:path>
             </a:pathLst>
           </a:custGeom>
-          <a:ln/>
-          <a:extLst>
-            <a:ext uri="{91240B29-F687-4f45-9708-019B960494DF}">
-              <a14:hiddenLine xmlns:a14="http://schemas.microsoft.com/office/drawing/2010/main" xmlns="" w="9525">
-                <a:solidFill>
-                  <a:srgbClr val="000000"/>
-                </a:solidFill>
-                <a:round/>
-                <a:headEnd/>
-                <a:tailEnd/>
-              </a14:hiddenLine>
-            </a:ext>
-          </a:extLst>
         </p:spPr>
         <p:style>
           <a:lnRef idx="1">
@@ -4253,6 +4258,7 @@
               <a:rPr lang="en-US"/>
               <a:t>Click to edit Master text styles</a:t>
             </a:r>
+            <a:endParaRPr lang="en-US"/>
           </a:p>
           <a:p>
             <a:pPr lvl="1"/>
@@ -4260,6 +4266,7 @@
               <a:rPr lang="en-US"/>
               <a:t>Second level</a:t>
             </a:r>
+            <a:endParaRPr lang="en-US"/>
           </a:p>
           <a:p>
             <a:pPr lvl="2"/>
@@ -4267,6 +4274,7 @@
               <a:rPr lang="en-US"/>
               <a:t>Third level</a:t>
             </a:r>
+            <a:endParaRPr lang="en-US"/>
           </a:p>
           <a:p>
             <a:pPr lvl="3"/>
@@ -4274,6 +4282,7 @@
               <a:rPr lang="en-US"/>
               <a:t>Fourth level</a:t>
             </a:r>
+            <a:endParaRPr lang="en-US"/>
           </a:p>
           <a:p>
             <a:pPr lvl="4"/>
@@ -4347,6 +4356,7 @@
               <a:rPr lang="en-US"/>
               <a:t>Click to edit Master text styles</a:t>
             </a:r>
+            <a:endParaRPr lang="en-US"/>
           </a:p>
         </p:txBody>
       </p:sp>
@@ -4367,7 +4377,6 @@
           <a:p>
             <a:fld id="{D5107B96-A816-446C-A91E-A38A52054936}" type="datetimeFigureOut">
               <a:rPr lang="en-US" smtClean="0"/>
-              <a:t>7/28/2024</a:t>
             </a:fld>
             <a:endParaRPr lang="en-US"/>
           </a:p>
@@ -4409,18 +4418,12 @@
           <a:p>
             <a:fld id="{605EEB0D-0159-442E-924A-131153166082}" type="slidenum">
               <a:rPr lang="en-US" smtClean="0"/>
-              <a:t>‹#›</a:t>
             </a:fld>
             <a:endParaRPr lang="en-US"/>
           </a:p>
         </p:txBody>
       </p:sp>
     </p:spTree>
-    <p:extLst>
-      <p:ext uri="{BB962C8B-B14F-4D97-AF65-F5344CB8AC3E}">
-        <p14:creationId xmlns:p14="http://schemas.microsoft.com/office/powerpoint/2010/main" val="3853362993"/>
-      </p:ext>
-    </p:extLst>
   </p:cSld>
   <p:clrMapOvr>
     <a:masterClrMapping/>
@@ -4563,16 +4566,11 @@
               <a:schemeClr val="tx2"/>
             </a:solidFill>
             <a:round/>
-            <a:headEnd/>
-            <a:tailEnd/>
           </a:ln>
           <a:effectLst/>
         </p:spPr>
         <p:txBody>
           <a:bodyPr wrap="square" numCol="1" anchor="t" anchorCtr="0" compatLnSpc="1">
-            <a:prstTxWarp prst="textNoShape">
-              <a:avLst/>
-            </a:prstTxWarp>
             <a:normAutofit/>
           </a:bodyPr>
           <a:lstStyle>
@@ -4655,6 +4653,7 @@
               <a:rPr lang="en-US"/>
               <a:t>Click to edit Master text styles</a:t>
             </a:r>
+            <a:endParaRPr lang="en-US"/>
           </a:p>
         </p:txBody>
       </p:sp>
@@ -4680,7 +4679,6 @@
           <a:p>
             <a:fld id="{D5107B96-A816-446C-A91E-A38A52054936}" type="datetimeFigureOut">
               <a:rPr lang="en-US" smtClean="0"/>
-              <a:t>7/28/2024</a:t>
             </a:fld>
             <a:endParaRPr lang="en-US"/>
           </a:p>
@@ -4732,18 +4730,12 @@
           <a:p>
             <a:fld id="{605EEB0D-0159-442E-924A-131153166082}" type="slidenum">
               <a:rPr lang="en-US" smtClean="0"/>
-              <a:t>‹#›</a:t>
             </a:fld>
             <a:endParaRPr lang="en-US"/>
           </a:p>
         </p:txBody>
       </p:sp>
     </p:spTree>
-    <p:extLst>
-      <p:ext uri="{BB962C8B-B14F-4D97-AF65-F5344CB8AC3E}">
-        <p14:creationId xmlns:p14="http://schemas.microsoft.com/office/powerpoint/2010/main" val="3131522633"/>
-      </p:ext>
-    </p:extLst>
   </p:cSld>
   <p:clrMapOvr>
     <a:masterClrMapping/>
@@ -4850,6 +4842,7 @@
               <a:rPr lang="en-US"/>
               <a:t>Click to edit Master text styles</a:t>
             </a:r>
+            <a:endParaRPr lang="en-US"/>
           </a:p>
           <a:p>
             <a:pPr lvl="1"/>
@@ -4857,6 +4850,7 @@
               <a:rPr lang="en-US"/>
               <a:t>Second level</a:t>
             </a:r>
+            <a:endParaRPr lang="en-US"/>
           </a:p>
           <a:p>
             <a:pPr lvl="2"/>
@@ -4864,6 +4858,7 @@
               <a:rPr lang="en-US"/>
               <a:t>Third level</a:t>
             </a:r>
+            <a:endParaRPr lang="en-US"/>
           </a:p>
           <a:p>
             <a:pPr lvl="3"/>
@@ -4871,6 +4866,7 @@
               <a:rPr lang="en-US"/>
               <a:t>Fourth level</a:t>
             </a:r>
+            <a:endParaRPr lang="en-US"/>
           </a:p>
           <a:p>
             <a:pPr lvl="4"/>
@@ -4950,7 +4946,6 @@
           <a:p>
             <a:fld id="{D5107B96-A816-446C-A91E-A38A52054936}" type="datetimeFigureOut">
               <a:rPr lang="en-US" smtClean="0"/>
-              <a:t>7/28/2024</a:t>
             </a:fld>
             <a:endParaRPr lang="en-US"/>
           </a:p>
@@ -4989,35 +4984,30 @@
           <a:p>
             <a:fld id="{605EEB0D-0159-442E-924A-131153166082}" type="slidenum">
               <a:rPr lang="en-US" smtClean="0"/>
-              <a:t>‹#›</a:t>
             </a:fld>
             <a:endParaRPr lang="en-US"/>
           </a:p>
         </p:txBody>
       </p:sp>
     </p:spTree>
-    <p:extLst>
-      <p:ext uri="{BB962C8B-B14F-4D97-AF65-F5344CB8AC3E}">
-        <p14:creationId xmlns:p14="http://schemas.microsoft.com/office/powerpoint/2010/main" val="4257554733"/>
-      </p:ext>
-    </p:extLst>
   </p:cSld>
   <p:clrMap bg1="dk1" tx1="lt1" bg2="dk2" tx2="lt2" accent1="accent1" accent2="accent2" accent3="accent3" accent4="accent4" accent5="accent5" accent6="accent6" hlink="hlink" folHlink="folHlink"/>
   <p:sldLayoutIdLst>
-    <p:sldLayoutId id="2147483661" r:id="rId1"/>
-    <p:sldLayoutId id="2147483662" r:id="rId2"/>
-    <p:sldLayoutId id="2147483663" r:id="rId3"/>
-    <p:sldLayoutId id="2147483664" r:id="rId4"/>
-    <p:sldLayoutId id="2147483665" r:id="rId5"/>
-    <p:sldLayoutId id="2147483666" r:id="rId6"/>
-    <p:sldLayoutId id="2147483667" r:id="rId7"/>
-    <p:sldLayoutId id="2147483668" r:id="rId8"/>
-    <p:sldLayoutId id="2147483669" r:id="rId9"/>
-    <p:sldLayoutId id="2147483670" r:id="rId10"/>
-    <p:sldLayoutId id="2147483671" r:id="rId11"/>
-    <p:sldLayoutId id="2147483672" r:id="rId12"/>
-    <p:sldLayoutId id="2147483673" r:id="rId13"/>
-    <p:sldLayoutId id="2147483674" r:id="rId14"/>
+    <p:sldLayoutId id="2147483649" r:id="rId1"/>
+    <p:sldLayoutId id="2147483650" r:id="rId2"/>
+    <p:sldLayoutId id="2147483651" r:id="rId3"/>
+    <p:sldLayoutId id="2147483652" r:id="rId4"/>
+    <p:sldLayoutId id="2147483653" r:id="rId5"/>
+    <p:sldLayoutId id="2147483654" r:id="rId6"/>
+    <p:sldLayoutId id="2147483655" r:id="rId7"/>
+    <p:sldLayoutId id="2147483656" r:id="rId8"/>
+    <p:sldLayoutId id="2147483657" r:id="rId9"/>
+    <p:sldLayoutId id="2147483658" r:id="rId10"/>
+    <p:sldLayoutId id="2147483659" r:id="rId11"/>
+    <p:sldLayoutId id="2147483660" r:id="rId12"/>
+    <p:sldLayoutId id="2147483661" r:id="rId13"/>
+    <p:sldLayoutId id="2147483662" r:id="rId14"/>
+    <p:sldLayoutId id="2147483663" r:id="rId15"/>
   </p:sldLayoutIdLst>
   <p:txStyles>
     <p:titleStyle>
@@ -5103,7 +5093,7 @@
         <a:buClr>
           <a:schemeClr val="accent1"/>
         </a:buClr>
-        <a:buFont typeface="Wingdings 2" charset="2"/>
+        <a:buFont typeface="Wingdings 2" panose="05020102010507070707" charset="2"/>
         <a:buChar char=""/>
         <a:defRPr sz="1800" kern="1200">
           <a:solidFill>
@@ -5124,7 +5114,7 @@
         <a:buClr>
           <a:schemeClr val="accent1"/>
         </a:buClr>
-        <a:buFont typeface="Wingdings 2" charset="2"/>
+        <a:buFont typeface="Wingdings 2" panose="05020102010507070707" charset="2"/>
         <a:buChar char=""/>
         <a:defRPr sz="1600" kern="1200">
           <a:solidFill>
@@ -5145,7 +5135,7 @@
         <a:buClr>
           <a:schemeClr val="accent1"/>
         </a:buClr>
-        <a:buFont typeface="Wingdings 2" charset="2"/>
+        <a:buFont typeface="Wingdings 2" panose="05020102010507070707" charset="2"/>
         <a:buChar char=""/>
         <a:defRPr sz="1400" kern="1200">
           <a:solidFill>
@@ -5166,7 +5156,7 @@
         <a:buClr>
           <a:schemeClr val="accent1"/>
         </a:buClr>
-        <a:buFont typeface="Wingdings 2" charset="2"/>
+        <a:buFont typeface="Wingdings 2" panose="05020102010507070707" charset="2"/>
         <a:buChar char=""/>
         <a:defRPr sz="1200" kern="1200">
           <a:solidFill>
@@ -5187,7 +5177,7 @@
         <a:buClr>
           <a:schemeClr val="accent1"/>
         </a:buClr>
-        <a:buFont typeface="Wingdings 2" charset="2"/>
+        <a:buFont typeface="Wingdings 2" panose="05020102010507070707" charset="2"/>
         <a:buChar char=""/>
         <a:defRPr sz="1200" kern="1200">
           <a:solidFill>
@@ -5198,7 +5188,7 @@
           <a:cs typeface="+mn-cs"/>
         </a:defRPr>
       </a:lvl5pPr>
-      <a:lvl6pPr marL="2400000" indent="-228600" algn="l" defTabSz="457200" rtl="0" eaLnBrk="1" latinLnBrk="0" hangingPunct="1">
+      <a:lvl6pPr marL="2400300" indent="-228600" algn="l" defTabSz="457200" rtl="0" eaLnBrk="1" latinLnBrk="0" hangingPunct="1">
         <a:spcBef>
           <a:spcPct val="20000"/>
         </a:spcBef>
@@ -5208,7 +5198,7 @@
         <a:buClr>
           <a:schemeClr val="accent1"/>
         </a:buClr>
-        <a:buFont typeface="Wingdings 2" charset="2"/>
+        <a:buFont typeface="Wingdings 2" panose="05020102010507070707" charset="2"/>
         <a:buChar char=""/>
         <a:defRPr sz="1200" kern="1200">
           <a:solidFill>
@@ -5219,7 +5209,7 @@
           <a:cs typeface="+mn-cs"/>
         </a:defRPr>
       </a:lvl6pPr>
-      <a:lvl7pPr marL="2800000" indent="-228600" algn="l" defTabSz="457200" rtl="0" eaLnBrk="1" latinLnBrk="0" hangingPunct="1">
+      <a:lvl7pPr marL="2799715" indent="-228600" algn="l" defTabSz="457200" rtl="0" eaLnBrk="1" latinLnBrk="0" hangingPunct="1">
         <a:spcBef>
           <a:spcPct val="20000"/>
         </a:spcBef>
@@ -5229,7 +5219,7 @@
         <a:buClr>
           <a:schemeClr val="accent1"/>
         </a:buClr>
-        <a:buFont typeface="Wingdings 2" charset="2"/>
+        <a:buFont typeface="Wingdings 2" panose="05020102010507070707" charset="2"/>
         <a:buChar char=""/>
         <a:defRPr sz="1200" kern="1200">
           <a:solidFill>
@@ -5240,7 +5230,7 @@
           <a:cs typeface="+mn-cs"/>
         </a:defRPr>
       </a:lvl7pPr>
-      <a:lvl8pPr marL="3200000" indent="-228600" algn="l" defTabSz="457200" rtl="0" eaLnBrk="1" latinLnBrk="0" hangingPunct="1">
+      <a:lvl8pPr marL="3199765" indent="-228600" algn="l" defTabSz="457200" rtl="0" eaLnBrk="1" latinLnBrk="0" hangingPunct="1">
         <a:spcBef>
           <a:spcPct val="20000"/>
         </a:spcBef>
@@ -5250,7 +5240,7 @@
         <a:buClr>
           <a:schemeClr val="accent1"/>
         </a:buClr>
-        <a:buFont typeface="Wingdings 2" charset="2"/>
+        <a:buFont typeface="Wingdings 2" panose="05020102010507070707" charset="2"/>
         <a:buChar char=""/>
         <a:defRPr sz="1200" kern="1200">
           <a:solidFill>
@@ -5261,7 +5251,7 @@
           <a:cs typeface="+mn-cs"/>
         </a:defRPr>
       </a:lvl8pPr>
-      <a:lvl9pPr marL="3600000" indent="-228600" algn="l" defTabSz="457200" rtl="0" eaLnBrk="1" latinLnBrk="0" hangingPunct="1">
+      <a:lvl9pPr marL="3599815" indent="-228600" algn="l" defTabSz="457200" rtl="0" eaLnBrk="1" latinLnBrk="0" hangingPunct="1">
         <a:spcBef>
           <a:spcPct val="20000"/>
         </a:spcBef>
@@ -5271,7 +5261,7 @@
         <a:buClr>
           <a:schemeClr val="accent1"/>
         </a:buClr>
-        <a:buFont typeface="Wingdings 2" charset="2"/>
+        <a:buFont typeface="Wingdings 2" panose="05020102010507070707" charset="2"/>
         <a:buChar char=""/>
         <a:defRPr sz="1200" kern="1200">
           <a:solidFill>
@@ -5401,13 +5391,7 @@
       </p:grpSpPr>
       <p:sp>
         <p:nvSpPr>
-          <p:cNvPr id="2" name="Title 1">
-            <a:extLst>
-              <a:ext uri="{FF2B5EF4-FFF2-40B4-BE49-F238E27FC236}">
-                <a16:creationId xmlns:a16="http://schemas.microsoft.com/office/drawing/2014/main" id="{ABFEC45B-2EEB-F56D-E38D-EF812C58DE62}"/>
-              </a:ext>
-            </a:extLst>
-          </p:cNvPr>
+          <p:cNvPr id="2" name="Title 1"/>
           <p:cNvSpPr>
             <a:spLocks noGrp="1"/>
           </p:cNvSpPr>
@@ -5424,18 +5408,13 @@
               <a:rPr lang="en-US" dirty="0"/>
               <a:t>Spam Classifier</a:t>
             </a:r>
-          </a:p>
-        </p:txBody>
-      </p:sp>
-      <p:sp>
-        <p:nvSpPr>
-          <p:cNvPr id="3" name="Subtitle 2">
-            <a:extLst>
-              <a:ext uri="{FF2B5EF4-FFF2-40B4-BE49-F238E27FC236}">
-                <a16:creationId xmlns:a16="http://schemas.microsoft.com/office/drawing/2014/main" id="{C57B9BB7-CE8D-28BC-8339-C28CCE5DEB43}"/>
-              </a:ext>
-            </a:extLst>
-          </p:cNvPr>
+            <a:endParaRPr lang="en-US" dirty="0"/>
+          </a:p>
+        </p:txBody>
+      </p:sp>
+      <p:sp>
+        <p:nvSpPr>
+          <p:cNvPr id="3" name="Subtitle 2"/>
           <p:cNvSpPr>
             <a:spLocks noGrp="1"/>
           </p:cNvSpPr>
@@ -5452,50 +5431,11 @@
               <a:rPr lang="en-US" dirty="0"/>
               <a:t>A NLP project to predict weather a mail is spam or not?</a:t>
             </a:r>
-          </a:p>
-        </p:txBody>
-      </p:sp>
-      <p:sp>
-        <p:nvSpPr>
-          <p:cNvPr id="5" name="TextBox 4">
-            <a:extLst>
-              <a:ext uri="{FF2B5EF4-FFF2-40B4-BE49-F238E27FC236}">
-                <a16:creationId xmlns:a16="http://schemas.microsoft.com/office/drawing/2014/main" id="{9C0A450F-D531-B77D-31FC-087820BA27C4}"/>
-              </a:ext>
-            </a:extLst>
-          </p:cNvPr>
-          <p:cNvSpPr txBox="1"/>
-          <p:nvPr/>
-        </p:nvSpPr>
-        <p:spPr>
-          <a:xfrm>
-            <a:off x="3049929" y="3247227"/>
-            <a:ext cx="6099858" cy="369332"/>
-          </a:xfrm>
-          <a:prstGeom prst="rect">
-            <a:avLst/>
-          </a:prstGeom>
-          <a:noFill/>
-        </p:spPr>
-        <p:txBody>
-          <a:bodyPr wrap="square">
-            <a:spAutoFit/>
-          </a:bodyPr>
-          <a:lstStyle/>
-          <a:p>
-            <a:r>
-              <a:rPr lang="en-US" sz="1800" dirty="0"/>
-              <a:t>Feature Selection</a:t>
-            </a:r>
+            <a:endParaRPr lang="en-US" dirty="0"/>
           </a:p>
         </p:txBody>
       </p:sp>
     </p:spTree>
-    <p:extLst>
-      <p:ext uri="{BB962C8B-B14F-4D97-AF65-F5344CB8AC3E}">
-        <p14:creationId xmlns:p14="http://schemas.microsoft.com/office/powerpoint/2010/main" val="3081800889"/>
-      </p:ext>
-    </p:extLst>
   </p:cSld>
   <p:clrMapOvr>
     <a:masterClrMapping/>
@@ -5530,13 +5470,7 @@
       </p:grpSpPr>
       <p:sp>
         <p:nvSpPr>
-          <p:cNvPr id="2" name="Title 1">
-            <a:extLst>
-              <a:ext uri="{FF2B5EF4-FFF2-40B4-BE49-F238E27FC236}">
-                <a16:creationId xmlns:a16="http://schemas.microsoft.com/office/drawing/2014/main" id="{5B8D88AE-13EE-0391-3C70-94F854004867}"/>
-              </a:ext>
-            </a:extLst>
-          </p:cNvPr>
+          <p:cNvPr id="6" name="Title 5"/>
           <p:cNvSpPr>
             <a:spLocks noGrp="1"/>
           </p:cNvSpPr>
@@ -5544,67 +5478,140 @@
             <p:ph type="title"/>
           </p:nvPr>
         </p:nvSpPr>
+        <p:spPr/>
+        <p:txBody>
+          <a:bodyPr/>
+          <a:p>
+            <a:r>
+              <a:rPr lang="en-GB" altLang="en-US"/>
+              <a:t>25 most common keyword in messages</a:t>
+            </a:r>
+            <a:endParaRPr lang="en-GB" altLang="en-US"/>
+          </a:p>
+        </p:txBody>
+      </p:sp>
+      <p:pic>
+        <p:nvPicPr>
+          <p:cNvPr id="4" name="Content Placeholder 3"/>
+          <p:cNvPicPr>
+            <a:picLocks noChangeAspect="1"/>
+          </p:cNvPicPr>
+          <p:nvPr>
+            <p:ph sz="half" idx="1"/>
+            <p:custDataLst>
+              <p:tags r:id="rId1"/>
+            </p:custDataLst>
+          </p:nvPr>
+        </p:nvPicPr>
+        <p:blipFill>
+          <a:blip r:embed="rId2"/>
+          <a:stretch>
+            <a:fillRect/>
+          </a:stretch>
+        </p:blipFill>
         <p:spPr>
           <a:xfrm>
-            <a:off x="965200" y="1218476"/>
-            <a:ext cx="3187318" cy="4421050"/>
+            <a:off x="818515" y="2576830"/>
+            <a:ext cx="5186045" cy="3557905"/>
           </a:xfrm>
+          <a:prstGeom prst="rect">
+            <a:avLst/>
+          </a:prstGeom>
           <a:effectLst/>
         </p:spPr>
-        <p:txBody>
-          <a:bodyPr anchor="ctr">
-            <a:normAutofit/>
-          </a:bodyPr>
-          <a:lstStyle/>
-          <a:p>
-            <a:pPr algn="r"/>
-            <a:endParaRPr lang="en-US" sz="3200">
-              <a:solidFill>
-                <a:schemeClr val="tx1"/>
-              </a:solidFill>
-            </a:endParaRPr>
-          </a:p>
-        </p:txBody>
-      </p:sp>
-      <p:sp>
-        <p:nvSpPr>
-          <p:cNvPr id="3" name="Content Placeholder 2">
-            <a:extLst>
-              <a:ext uri="{FF2B5EF4-FFF2-40B4-BE49-F238E27FC236}">
-                <a16:creationId xmlns:a16="http://schemas.microsoft.com/office/drawing/2014/main" id="{5098C138-4C4C-14F8-F0B2-9F50DDE6B718}"/>
-              </a:ext>
-            </a:extLst>
-          </p:cNvPr>
-          <p:cNvSpPr>
-            <a:spLocks noGrp="1"/>
-          </p:cNvSpPr>
-          <p:nvPr>
-            <p:ph idx="1"/>
-          </p:nvPr>
-        </p:nvSpPr>
+      </p:pic>
+      <p:pic>
+        <p:nvPicPr>
+          <p:cNvPr id="5" name="Content Placeholder 4"/>
+          <p:cNvPicPr>
+            <a:picLocks noChangeAspect="1"/>
+          </p:cNvPicPr>
+          <p:nvPr>
+            <p:ph sz="half" idx="2"/>
+            <p:custDataLst>
+              <p:tags r:id="rId3"/>
+            </p:custDataLst>
+          </p:nvPr>
+        </p:nvPicPr>
+        <p:blipFill>
+          <a:blip r:embed="rId4"/>
+          <a:stretch>
+            <a:fillRect/>
+          </a:stretch>
+        </p:blipFill>
         <p:spPr>
           <a:xfrm>
-            <a:off x="5146751" y="1218475"/>
-            <a:ext cx="6080050" cy="4421051"/>
+            <a:off x="6202045" y="2576830"/>
+            <a:ext cx="5179695" cy="3638550"/>
           </a:xfrm>
-          <a:effectLst/>
+          <a:prstGeom prst="rect">
+            <a:avLst/>
+          </a:prstGeom>
         </p:spPr>
-        <p:txBody>
-          <a:bodyPr>
-            <a:normAutofit/>
+      </p:pic>
+      <p:sp>
+        <p:nvSpPr>
+          <p:cNvPr id="7" name="Text Box 6"/>
+          <p:cNvSpPr txBox="1"/>
+          <p:nvPr/>
+        </p:nvSpPr>
+        <p:spPr>
+          <a:xfrm>
+            <a:off x="8389620" y="2013585"/>
+            <a:ext cx="4064000" cy="368300"/>
+          </a:xfrm>
+          <a:prstGeom prst="rect">
+            <a:avLst/>
+          </a:prstGeom>
+          <a:noFill/>
+        </p:spPr>
+        <p:txBody>
+          <a:bodyPr wrap="square" rtlCol="0">
+            <a:spAutoFit/>
           </a:bodyPr>
-          <a:lstStyle/>
-          <a:p>
-            <a:endParaRPr lang="en-US" sz="1600"/>
+          <a:p>
+            <a:r>
+              <a:rPr lang="en-GB" altLang="en-US"/>
+              <a:t>Ham</a:t>
+            </a:r>
+            <a:endParaRPr lang="en-GB" altLang="en-US"/>
+          </a:p>
+        </p:txBody>
+      </p:sp>
+      <p:sp>
+        <p:nvSpPr>
+          <p:cNvPr id="8" name="Text Box 7"/>
+          <p:cNvSpPr txBox="1"/>
+          <p:nvPr/>
+        </p:nvSpPr>
+        <p:spPr>
+          <a:xfrm>
+            <a:off x="2691130" y="2013585"/>
+            <a:ext cx="6096000" cy="368300"/>
+          </a:xfrm>
+          <a:prstGeom prst="rect">
+            <a:avLst/>
+          </a:prstGeom>
+          <a:noFill/>
+        </p:spPr>
+        <p:txBody>
+          <a:bodyPr wrap="square" rtlCol="0" anchor="t">
+            <a:spAutoFit/>
+          </a:bodyPr>
+          <a:p>
+            <a:r>
+              <a:rPr lang="en-GB" altLang="en-US">
+                <a:sym typeface="+mn-ea"/>
+              </a:rPr>
+              <a:t>Spam</a:t>
+            </a:r>
+            <a:endParaRPr lang="en-GB" altLang="en-US">
+              <a:sym typeface="+mn-ea"/>
+            </a:endParaRPr>
           </a:p>
         </p:txBody>
       </p:sp>
     </p:spTree>
-    <p:extLst>
-      <p:ext uri="{BB962C8B-B14F-4D97-AF65-F5344CB8AC3E}">
-        <p14:creationId xmlns:p14="http://schemas.microsoft.com/office/powerpoint/2010/main" val="2657108125"/>
-      </p:ext>
-    </p:extLst>
   </p:cSld>
   <p:clrMapOvr>
     <a:masterClrMapping/>
@@ -5631,13 +5638,7 @@
       </p:grpSpPr>
       <p:sp>
         <p:nvSpPr>
-          <p:cNvPr id="2" name="Title 1">
-            <a:extLst>
-              <a:ext uri="{FF2B5EF4-FFF2-40B4-BE49-F238E27FC236}">
-                <a16:creationId xmlns:a16="http://schemas.microsoft.com/office/drawing/2014/main" id="{1BD70CD0-7279-34C5-6406-7A07AA8F7A73}"/>
-              </a:ext>
-            </a:extLst>
-          </p:cNvPr>
+          <p:cNvPr id="2" name="Title 1"/>
           <p:cNvSpPr>
             <a:spLocks noGrp="1"/>
           </p:cNvSpPr>
@@ -5652,20 +5653,23 @@
           <a:p>
             <a:r>
               <a:rPr lang="en-US" dirty="0"/>
-              <a:t>How accurate is the final model?</a:t>
-            </a:r>
-          </a:p>
-        </p:txBody>
-      </p:sp>
-      <p:sp>
-        <p:nvSpPr>
-          <p:cNvPr id="3" name="Content Placeholder 2">
-            <a:extLst>
-              <a:ext uri="{FF2B5EF4-FFF2-40B4-BE49-F238E27FC236}">
-                <a16:creationId xmlns:a16="http://schemas.microsoft.com/office/drawing/2014/main" id="{14EC5244-9026-2C46-BCBB-B10048E22D9A}"/>
-              </a:ext>
-            </a:extLst>
-          </p:cNvPr>
+              <a:t>Feature </a:t>
+            </a:r>
+            <a:r>
+              <a:rPr lang="en-GB" altLang="en-US" dirty="0"/>
+              <a:t>used </a:t>
+            </a:r>
+            <a:r>
+              <a:rPr lang="en-US" dirty="0"/>
+              <a:t>for prediction?</a:t>
+            </a:r>
+            <a:endParaRPr lang="en-US" dirty="0"/>
+          </a:p>
+        </p:txBody>
+      </p:sp>
+      <p:sp>
+        <p:nvSpPr>
+          <p:cNvPr id="3" name="Content Placeholder 2"/>
           <p:cNvSpPr>
             <a:spLocks noGrp="1"/>
           </p:cNvSpPr>
@@ -5678,16 +5682,72 @@
           <a:bodyPr/>
           <a:lstStyle/>
           <a:p>
-            <a:endParaRPr lang="en-US"/>
+            <a:r>
+              <a:rPr lang="en-GB" altLang="en-US"/>
+              <a:t>the main input feture will be only the received text message</a:t>
+            </a:r>
+            <a:endParaRPr lang="en-GB" altLang="en-US"/>
+          </a:p>
+          <a:p>
+            <a:r>
+              <a:rPr lang="en-GB" altLang="en-US"/>
+              <a:t>and other features are constructed from this single text message itself which are:</a:t>
+            </a:r>
+            <a:endParaRPr lang="en-GB" altLang="en-US"/>
+          </a:p>
+          <a:p>
+            <a:pPr lvl="1"/>
+            <a:r>
+              <a:rPr lang="en-GB" altLang="en-US"/>
+              <a:t>no of characters in the message.</a:t>
+            </a:r>
+            <a:endParaRPr lang="en-GB" altLang="en-US"/>
+          </a:p>
+          <a:p>
+            <a:pPr lvl="1"/>
+            <a:r>
+              <a:rPr lang="en-GB" altLang="en-US">
+                <a:sym typeface="+mn-ea"/>
+              </a:rPr>
+              <a:t>no of words in the message.</a:t>
+            </a:r>
+            <a:endParaRPr lang="en-GB" altLang="en-US">
+              <a:sym typeface="+mn-ea"/>
+            </a:endParaRPr>
+          </a:p>
+          <a:p>
+            <a:pPr lvl="1"/>
+            <a:r>
+              <a:rPr lang="en-GB" altLang="en-US">
+                <a:sym typeface="+mn-ea"/>
+              </a:rPr>
+              <a:t>no of sentences in the message.</a:t>
+            </a:r>
+            <a:endParaRPr lang="en-GB" altLang="en-US">
+              <a:sym typeface="+mn-ea"/>
+            </a:endParaRPr>
+          </a:p>
+          <a:p>
+            <a:pPr lvl="1"/>
+            <a:r>
+              <a:rPr lang="en-GB" altLang="en-US"/>
+              <a:t>presence of </a:t>
+            </a:r>
+            <a:r>
+              <a:rPr lang="en-GB" altLang="en-US">
+                <a:sym typeface="+mn-ea"/>
+              </a:rPr>
+              <a:t>25  </a:t>
+            </a:r>
+            <a:r>
+              <a:rPr lang="en-GB" altLang="en-US"/>
+              <a:t>most commonly used words.</a:t>
+            </a:r>
+            <a:endParaRPr lang="en-GB" altLang="en-US"/>
           </a:p>
         </p:txBody>
       </p:sp>
     </p:spTree>
-    <p:extLst>
-      <p:ext uri="{BB962C8B-B14F-4D97-AF65-F5344CB8AC3E}">
-        <p14:creationId xmlns:p14="http://schemas.microsoft.com/office/powerpoint/2010/main" val="3222795378"/>
-      </p:ext>
-    </p:extLst>
   </p:cSld>
   <p:clrMapOvr>
     <a:masterClrMapping/>
@@ -5714,13 +5774,7 @@
       </p:grpSpPr>
       <p:sp>
         <p:nvSpPr>
-          <p:cNvPr id="2" name="Title 1">
-            <a:extLst>
-              <a:ext uri="{FF2B5EF4-FFF2-40B4-BE49-F238E27FC236}">
-                <a16:creationId xmlns:a16="http://schemas.microsoft.com/office/drawing/2014/main" id="{1BD70CD0-7279-34C5-6406-7A07AA8F7A73}"/>
-              </a:ext>
-            </a:extLst>
-          </p:cNvPr>
+          <p:cNvPr id="2" name="Title 1"/>
           <p:cNvSpPr>
             <a:spLocks noGrp="1"/>
           </p:cNvSpPr>
@@ -5735,42 +5789,88 @@
           <a:p>
             <a:r>
               <a:rPr lang="en-US" dirty="0"/>
-              <a:t>Feature selected for prediction?</a:t>
-            </a:r>
-          </a:p>
-        </p:txBody>
-      </p:sp>
-      <p:sp>
-        <p:nvSpPr>
-          <p:cNvPr id="3" name="Content Placeholder 2">
-            <a:extLst>
-              <a:ext uri="{FF2B5EF4-FFF2-40B4-BE49-F238E27FC236}">
-                <a16:creationId xmlns:a16="http://schemas.microsoft.com/office/drawing/2014/main" id="{14EC5244-9026-2C46-BCBB-B10048E22D9A}"/>
-              </a:ext>
-            </a:extLst>
-          </p:cNvPr>
-          <p:cNvSpPr>
-            <a:spLocks noGrp="1"/>
-          </p:cNvSpPr>
-          <p:nvPr>
-            <p:ph idx="1"/>
-          </p:nvPr>
-        </p:nvSpPr>
-        <p:spPr/>
+              <a:t>How accurate is the final model?</a:t>
+            </a:r>
+            <a:endParaRPr lang="en-US" dirty="0"/>
+          </a:p>
+        </p:txBody>
+      </p:sp>
+      <p:sp>
+        <p:nvSpPr>
+          <p:cNvPr id="5" name="Content Placeholder 4"/>
+          <p:cNvSpPr/>
+          <p:nvPr>
+            <p:ph sz="half" idx="1"/>
+          </p:nvPr>
+        </p:nvSpPr>
+        <p:spPr>
+          <a:xfrm>
+            <a:off x="818515" y="2222500"/>
+            <a:ext cx="7150100" cy="3638550"/>
+          </a:xfrm>
+        </p:spPr>
         <p:txBody>
           <a:bodyPr/>
-          <a:lstStyle/>
-          <a:p>
-            <a:endParaRPr lang="en-US"/>
-          </a:p>
-        </p:txBody>
-      </p:sp>
+          <a:p>
+            <a:r>
+              <a:rPr lang="en-GB" altLang="en-US"/>
+              <a:t>Multinomial  Naive Bayes</a:t>
+            </a:r>
+            <a:endParaRPr lang="en-GB" altLang="en-US"/>
+          </a:p>
+          <a:p>
+            <a:r>
+              <a:rPr lang="en-GB" altLang="en-US"/>
+              <a:t>accuracy: 96%</a:t>
+            </a:r>
+            <a:endParaRPr lang="en-GB" altLang="en-US"/>
+          </a:p>
+          <a:p>
+            <a:r>
+              <a:rPr lang="en-GB" altLang="en-US"/>
+              <a:t>precision: 73%</a:t>
+            </a:r>
+            <a:endParaRPr lang="en-GB" altLang="en-US"/>
+          </a:p>
+          <a:p>
+            <a:r>
+              <a:rPr lang="en-GB" altLang="en-US"/>
+              <a:t>zero mistakes with False Positive Classification</a:t>
+            </a:r>
+            <a:endParaRPr lang="en-GB" altLang="en-US"/>
+          </a:p>
+          <a:p>
+            <a:endParaRPr lang="en-GB" altLang="en-US"/>
+          </a:p>
+        </p:txBody>
+      </p:sp>
+      <p:pic>
+        <p:nvPicPr>
+          <p:cNvPr id="6" name="Content Placeholder 5"/>
+          <p:cNvPicPr>
+            <a:picLocks noChangeAspect="1"/>
+          </p:cNvPicPr>
+          <p:nvPr>
+            <p:ph sz="half" idx="2"/>
+          </p:nvPr>
+        </p:nvPicPr>
+        <p:blipFill>
+          <a:blip r:embed="rId1"/>
+          <a:stretch>
+            <a:fillRect/>
+          </a:stretch>
+        </p:blipFill>
+        <p:spPr>
+          <a:xfrm>
+            <a:off x="941705" y="4736465"/>
+            <a:ext cx="2592070" cy="1004570"/>
+          </a:xfrm>
+          <a:prstGeom prst="rect">
+            <a:avLst/>
+          </a:prstGeom>
+        </p:spPr>
+      </p:pic>
     </p:spTree>
-    <p:extLst>
-      <p:ext uri="{BB962C8B-B14F-4D97-AF65-F5344CB8AC3E}">
-        <p14:creationId xmlns:p14="http://schemas.microsoft.com/office/powerpoint/2010/main" val="32911385"/>
-      </p:ext>
-    </p:extLst>
   </p:cSld>
   <p:clrMapOvr>
     <a:masterClrMapping/>
@@ -5797,13 +5897,7 @@
       </p:grpSpPr>
       <p:sp>
         <p:nvSpPr>
-          <p:cNvPr id="2" name="Title 1">
-            <a:extLst>
-              <a:ext uri="{FF2B5EF4-FFF2-40B4-BE49-F238E27FC236}">
-                <a16:creationId xmlns:a16="http://schemas.microsoft.com/office/drawing/2014/main" id="{1BD70CD0-7279-34C5-6406-7A07AA8F7A73}"/>
-              </a:ext>
-            </a:extLst>
-          </p:cNvPr>
+          <p:cNvPr id="2" name="Title 1"/>
           <p:cNvSpPr>
             <a:spLocks noGrp="1"/>
           </p:cNvSpPr>
@@ -5820,18 +5914,13 @@
               <a:rPr lang="en-US" dirty="0"/>
               <a:t>Checking out the code behind the scene</a:t>
             </a:r>
-          </a:p>
-        </p:txBody>
-      </p:sp>
-      <p:sp>
-        <p:nvSpPr>
-          <p:cNvPr id="3" name="Content Placeholder 2">
-            <a:extLst>
-              <a:ext uri="{FF2B5EF4-FFF2-40B4-BE49-F238E27FC236}">
-                <a16:creationId xmlns:a16="http://schemas.microsoft.com/office/drawing/2014/main" id="{14EC5244-9026-2C46-BCBB-B10048E22D9A}"/>
-              </a:ext>
-            </a:extLst>
-          </p:cNvPr>
+            <a:endParaRPr lang="en-US" dirty="0"/>
+          </a:p>
+        </p:txBody>
+      </p:sp>
+      <p:sp>
+        <p:nvSpPr>
+          <p:cNvPr id="3" name="Content Placeholder 2"/>
           <p:cNvSpPr>
             <a:spLocks noGrp="1"/>
           </p:cNvSpPr>
@@ -5882,15 +5971,11 @@
               <a:rPr lang="en-US" sz="2400" dirty="0"/>
               <a:t> this model.</a:t>
             </a:r>
+            <a:endParaRPr lang="en-US" sz="2400" dirty="0"/>
           </a:p>
         </p:txBody>
       </p:sp>
     </p:spTree>
-    <p:extLst>
-      <p:ext uri="{BB962C8B-B14F-4D97-AF65-F5344CB8AC3E}">
-        <p14:creationId xmlns:p14="http://schemas.microsoft.com/office/powerpoint/2010/main" val="375199058"/>
-      </p:ext>
-    </p:extLst>
   </p:cSld>
   <p:clrMapOvr>
     <a:masterClrMapping/>
@@ -5899,382 +5984,6 @@
 </file>
 
 <file path=ppt/slides/slide14.xml><?xml version="1.0" encoding="utf-8"?>
-<p:sld xmlns:a="http://schemas.openxmlformats.org/drawingml/2006/main" xmlns:r="http://schemas.openxmlformats.org/officeDocument/2006/relationships" xmlns:p="http://schemas.openxmlformats.org/presentationml/2006/main">
-  <p:cSld>
-    <p:bg>
-      <p:bgPr>
-        <a:solidFill>
-          <a:schemeClr val="bg2"/>
-        </a:solidFill>
-        <a:effectLst/>
-      </p:bgPr>
-    </p:bg>
-    <p:spTree>
-      <p:nvGrpSpPr>
-        <p:cNvPr id="1" name=""/>
-        <p:cNvGrpSpPr/>
-        <p:nvPr/>
-      </p:nvGrpSpPr>
-      <p:grpSpPr>
-        <a:xfrm>
-          <a:off x="0" y="0"/>
-          <a:ext cx="0" cy="0"/>
-          <a:chOff x="0" y="0"/>
-          <a:chExt cx="0" cy="0"/>
-        </a:xfrm>
-      </p:grpSpPr>
-      <p:sp useBgFill="1">
-        <p:nvSpPr>
-          <p:cNvPr id="12" name="Rectangle 11">
-            <a:extLst>
-              <a:ext uri="{FF2B5EF4-FFF2-40B4-BE49-F238E27FC236}">
-                <a16:creationId xmlns:a16="http://schemas.microsoft.com/office/drawing/2014/main" id="{F1E0D4A3-ECB8-4689-ABDB-9CE848CE83B9}"/>
-              </a:ext>
-              <a:ext uri="{C183D7F6-B498-43B3-948B-1728B52AA6E4}">
-                <adec:decorative xmlns:adec="http://schemas.microsoft.com/office/drawing/2017/decorative" val="1"/>
-              </a:ext>
-            </a:extLst>
-          </p:cNvPr>
-          <p:cNvSpPr>
-            <a:spLocks noGrp="1" noRot="1" noChangeAspect="1" noMove="1" noResize="1" noEditPoints="1" noAdjustHandles="1" noChangeArrowheads="1" noChangeShapeType="1" noTextEdit="1"/>
-          </p:cNvSpPr>
-          <p:nvPr>
-            <p:extLst>
-              <p:ext uri="{386F3935-93C4-4BCD-93E2-E3B085C9AB24}">
-                <p16:designElem xmlns:p16="http://schemas.microsoft.com/office/powerpoint/2015/main" val="1"/>
-              </p:ext>
-            </p:extLst>
-          </p:nvPr>
-        </p:nvSpPr>
-        <p:spPr>
-          <a:xfrm>
-            <a:off x="0" y="0"/>
-            <a:ext cx="12192000" cy="6858000"/>
-          </a:xfrm>
-          <a:prstGeom prst="rect">
-            <a:avLst/>
-          </a:prstGeom>
-          <a:ln>
-            <a:noFill/>
-          </a:ln>
-        </p:spPr>
-        <p:style>
-          <a:lnRef idx="2">
-            <a:schemeClr val="accent1">
-              <a:shade val="50000"/>
-            </a:schemeClr>
-          </a:lnRef>
-          <a:fillRef idx="1">
-            <a:schemeClr val="accent1"/>
-          </a:fillRef>
-          <a:effectRef idx="0">
-            <a:schemeClr val="accent1"/>
-          </a:effectRef>
-          <a:fontRef idx="minor">
-            <a:schemeClr val="lt1"/>
-          </a:fontRef>
-        </p:style>
-        <p:txBody>
-          <a:bodyPr rtlCol="0" anchor="ctr"/>
-          <a:lstStyle/>
-          <a:p>
-            <a:pPr algn="ctr"/>
-            <a:endParaRPr lang="en-US"/>
-          </a:p>
-        </p:txBody>
-      </p:sp>
-      <p:sp>
-        <p:nvSpPr>
-          <p:cNvPr id="2" name="Title 1">
-            <a:extLst>
-              <a:ext uri="{FF2B5EF4-FFF2-40B4-BE49-F238E27FC236}">
-                <a16:creationId xmlns:a16="http://schemas.microsoft.com/office/drawing/2014/main" id="{1BD70CD0-7279-34C5-6406-7A07AA8F7A73}"/>
-              </a:ext>
-            </a:extLst>
-          </p:cNvPr>
-          <p:cNvSpPr>
-            <a:spLocks noGrp="1"/>
-          </p:cNvSpPr>
-          <p:nvPr>
-            <p:ph type="title"/>
-          </p:nvPr>
-        </p:nvSpPr>
-        <p:spPr>
-          <a:xfrm>
-            <a:off x="810001" y="2943775"/>
-            <a:ext cx="10571998" cy="970450"/>
-          </a:xfrm>
-          <a:effectLst/>
-        </p:spPr>
-        <p:txBody>
-          <a:bodyPr anchor="ctr">
-            <a:normAutofit/>
-          </a:bodyPr>
-          <a:lstStyle/>
-          <a:p>
-            <a:pPr algn="ctr"/>
-            <a:r>
-              <a:rPr lang="en-US" sz="2800" dirty="0">
-                <a:solidFill>
-                  <a:schemeClr val="tx1"/>
-                </a:solidFill>
-              </a:rPr>
-              <a:t>Through Sophisticated PPT or Python Notebook?</a:t>
-            </a:r>
-          </a:p>
-        </p:txBody>
-      </p:sp>
-      <p:sp>
-        <p:nvSpPr>
-          <p:cNvPr id="13" name="Freeform: Shape 12">
-            <a:extLst>
-              <a:ext uri="{FF2B5EF4-FFF2-40B4-BE49-F238E27FC236}">
-                <a16:creationId xmlns:a16="http://schemas.microsoft.com/office/drawing/2014/main" id="{8854772B-9C8F-4037-89E0-3A45208AB395}"/>
-              </a:ext>
-              <a:ext uri="{C183D7F6-B498-43B3-948B-1728B52AA6E4}">
-                <adec:decorative xmlns:adec="http://schemas.microsoft.com/office/drawing/2017/decorative" val="1"/>
-              </a:ext>
-            </a:extLst>
-          </p:cNvPr>
-          <p:cNvSpPr>
-            <a:spLocks noGrp="1" noRot="1" noChangeAspect="1" noMove="1" noResize="1" noEditPoints="1" noAdjustHandles="1" noChangeArrowheads="1" noChangeShapeType="1" noTextEdit="1"/>
-          </p:cNvSpPr>
-          <p:nvPr>
-            <p:extLst>
-              <p:ext uri="{386F3935-93C4-4BCD-93E2-E3B085C9AB24}">
-                <p16:designElem xmlns:p16="http://schemas.microsoft.com/office/powerpoint/2015/main" val="1"/>
-              </p:ext>
-            </p:extLst>
-          </p:nvPr>
-        </p:nvSpPr>
-        <p:spPr>
-          <a:xfrm>
-            <a:off x="637093" y="1576408"/>
-            <a:ext cx="10917814" cy="4638125"/>
-          </a:xfrm>
-          <a:custGeom>
-            <a:avLst/>
-            <a:gdLst>
-              <a:gd name="connsiteX0" fmla="*/ 5441025 w 10917814"/>
-              <a:gd name="connsiteY0" fmla="*/ 0 h 4638125"/>
-              <a:gd name="connsiteX1" fmla="*/ 5453725 w 10917814"/>
-              <a:gd name="connsiteY1" fmla="*/ 0 h 4638125"/>
-              <a:gd name="connsiteX2" fmla="*/ 5464308 w 10917814"/>
-              <a:gd name="connsiteY2" fmla="*/ 0 h 4638125"/>
-              <a:gd name="connsiteX3" fmla="*/ 5477009 w 10917814"/>
-              <a:gd name="connsiteY3" fmla="*/ 4762 h 4638125"/>
-              <a:gd name="connsiteX4" fmla="*/ 5489708 w 10917814"/>
-              <a:gd name="connsiteY4" fmla="*/ 9525 h 4638125"/>
-              <a:gd name="connsiteX5" fmla="*/ 5498175 w 10917814"/>
-              <a:gd name="connsiteY5" fmla="*/ 12700 h 4638125"/>
-              <a:gd name="connsiteX6" fmla="*/ 5865801 w 10917814"/>
-              <a:gd name="connsiteY6" fmla="*/ 288419 h 4638125"/>
-              <a:gd name="connsiteX7" fmla="*/ 10765009 w 10917814"/>
-              <a:gd name="connsiteY7" fmla="*/ 288419 h 4638125"/>
-              <a:gd name="connsiteX8" fmla="*/ 10917814 w 10917814"/>
-              <a:gd name="connsiteY8" fmla="*/ 441224 h 4638125"/>
-              <a:gd name="connsiteX9" fmla="*/ 10917814 w 10917814"/>
-              <a:gd name="connsiteY9" fmla="*/ 4485320 h 4638125"/>
-              <a:gd name="connsiteX10" fmla="*/ 10765009 w 10917814"/>
-              <a:gd name="connsiteY10" fmla="*/ 4638125 h 4638125"/>
-              <a:gd name="connsiteX11" fmla="*/ 152805 w 10917814"/>
-              <a:gd name="connsiteY11" fmla="*/ 4638125 h 4638125"/>
-              <a:gd name="connsiteX12" fmla="*/ 0 w 10917814"/>
-              <a:gd name="connsiteY12" fmla="*/ 4485320 h 4638125"/>
-              <a:gd name="connsiteX13" fmla="*/ 0 w 10917814"/>
-              <a:gd name="connsiteY13" fmla="*/ 441224 h 4638125"/>
-              <a:gd name="connsiteX14" fmla="*/ 152805 w 10917814"/>
-              <a:gd name="connsiteY14" fmla="*/ 288419 h 4638125"/>
-              <a:gd name="connsiteX15" fmla="*/ 5041650 w 10917814"/>
-              <a:gd name="connsiteY15" fmla="*/ 288419 h 4638125"/>
-              <a:gd name="connsiteX16" fmla="*/ 5409275 w 10917814"/>
-              <a:gd name="connsiteY16" fmla="*/ 12700 h 4638125"/>
-              <a:gd name="connsiteX17" fmla="*/ 5417742 w 10917814"/>
-              <a:gd name="connsiteY17" fmla="*/ 9525 h 4638125"/>
-              <a:gd name="connsiteX18" fmla="*/ 5430442 w 10917814"/>
-              <a:gd name="connsiteY18" fmla="*/ 4762 h 4638125"/>
-            </a:gdLst>
-            <a:ahLst/>
-            <a:cxnLst>
-              <a:cxn ang="0">
-                <a:pos x="connsiteX0" y="connsiteY0"/>
-              </a:cxn>
-              <a:cxn ang="0">
-                <a:pos x="connsiteX1" y="connsiteY1"/>
-              </a:cxn>
-              <a:cxn ang="0">
-                <a:pos x="connsiteX2" y="connsiteY2"/>
-              </a:cxn>
-              <a:cxn ang="0">
-                <a:pos x="connsiteX3" y="connsiteY3"/>
-              </a:cxn>
-              <a:cxn ang="0">
-                <a:pos x="connsiteX4" y="connsiteY4"/>
-              </a:cxn>
-              <a:cxn ang="0">
-                <a:pos x="connsiteX5" y="connsiteY5"/>
-              </a:cxn>
-              <a:cxn ang="0">
-                <a:pos x="connsiteX6" y="connsiteY6"/>
-              </a:cxn>
-              <a:cxn ang="0">
-                <a:pos x="connsiteX7" y="connsiteY7"/>
-              </a:cxn>
-              <a:cxn ang="0">
-                <a:pos x="connsiteX8" y="connsiteY8"/>
-              </a:cxn>
-              <a:cxn ang="0">
-                <a:pos x="connsiteX9" y="connsiteY9"/>
-              </a:cxn>
-              <a:cxn ang="0">
-                <a:pos x="connsiteX10" y="connsiteY10"/>
-              </a:cxn>
-              <a:cxn ang="0">
-                <a:pos x="connsiteX11" y="connsiteY11"/>
-              </a:cxn>
-              <a:cxn ang="0">
-                <a:pos x="connsiteX12" y="connsiteY12"/>
-              </a:cxn>
-              <a:cxn ang="0">
-                <a:pos x="connsiteX13" y="connsiteY13"/>
-              </a:cxn>
-              <a:cxn ang="0">
-                <a:pos x="connsiteX14" y="connsiteY14"/>
-              </a:cxn>
-              <a:cxn ang="0">
-                <a:pos x="connsiteX15" y="connsiteY15"/>
-              </a:cxn>
-              <a:cxn ang="0">
-                <a:pos x="connsiteX16" y="connsiteY16"/>
-              </a:cxn>
-              <a:cxn ang="0">
-                <a:pos x="connsiteX17" y="connsiteY17"/>
-              </a:cxn>
-              <a:cxn ang="0">
-                <a:pos x="connsiteX18" y="connsiteY18"/>
-              </a:cxn>
-            </a:cxnLst>
-            <a:rect l="l" t="t" r="r" b="b"/>
-            <a:pathLst>
-              <a:path w="10917814" h="4638125">
-                <a:moveTo>
-                  <a:pt x="5441025" y="0"/>
-                </a:moveTo>
-                <a:lnTo>
-                  <a:pt x="5453725" y="0"/>
-                </a:lnTo>
-                <a:lnTo>
-                  <a:pt x="5464308" y="0"/>
-                </a:lnTo>
-                <a:lnTo>
-                  <a:pt x="5477009" y="4762"/>
-                </a:lnTo>
-                <a:lnTo>
-                  <a:pt x="5489708" y="9525"/>
-                </a:lnTo>
-                <a:lnTo>
-                  <a:pt x="5498175" y="12700"/>
-                </a:lnTo>
-                <a:lnTo>
-                  <a:pt x="5865801" y="288419"/>
-                </a:lnTo>
-                <a:lnTo>
-                  <a:pt x="10765009" y="288419"/>
-                </a:lnTo>
-                <a:cubicBezTo>
-                  <a:pt x="10849401" y="288419"/>
-                  <a:pt x="10917814" y="356832"/>
-                  <a:pt x="10917814" y="441224"/>
-                </a:cubicBezTo>
-                <a:lnTo>
-                  <a:pt x="10917814" y="4485320"/>
-                </a:lnTo>
-                <a:cubicBezTo>
-                  <a:pt x="10917814" y="4569712"/>
-                  <a:pt x="10849401" y="4638125"/>
-                  <a:pt x="10765009" y="4638125"/>
-                </a:cubicBezTo>
-                <a:lnTo>
-                  <a:pt x="152805" y="4638125"/>
-                </a:lnTo>
-                <a:cubicBezTo>
-                  <a:pt x="68413" y="4638125"/>
-                  <a:pt x="0" y="4569712"/>
-                  <a:pt x="0" y="4485320"/>
-                </a:cubicBezTo>
-                <a:lnTo>
-                  <a:pt x="0" y="441224"/>
-                </a:lnTo>
-                <a:cubicBezTo>
-                  <a:pt x="0" y="356832"/>
-                  <a:pt x="68413" y="288419"/>
-                  <a:pt x="152805" y="288419"/>
-                </a:cubicBezTo>
-                <a:lnTo>
-                  <a:pt x="5041650" y="288419"/>
-                </a:lnTo>
-                <a:lnTo>
-                  <a:pt x="5409275" y="12700"/>
-                </a:lnTo>
-                <a:lnTo>
-                  <a:pt x="5417742" y="9525"/>
-                </a:lnTo>
-                <a:lnTo>
-                  <a:pt x="5430442" y="4762"/>
-                </a:lnTo>
-                <a:close/>
-              </a:path>
-            </a:pathLst>
-          </a:custGeom>
-          <a:noFill/>
-          <a:ln w="19050">
-            <a:solidFill>
-              <a:schemeClr val="accent1"/>
-            </a:solidFill>
-          </a:ln>
-          <a:effectLst/>
-        </p:spPr>
-        <p:style>
-          <a:lnRef idx="2">
-            <a:schemeClr val="accent1">
-              <a:shade val="50000"/>
-            </a:schemeClr>
-          </a:lnRef>
-          <a:fillRef idx="1">
-            <a:schemeClr val="accent1"/>
-          </a:fillRef>
-          <a:effectRef idx="0">
-            <a:schemeClr val="accent1"/>
-          </a:effectRef>
-          <a:fontRef idx="minor">
-            <a:schemeClr val="lt1"/>
-          </a:fontRef>
-        </p:style>
-        <p:txBody>
-          <a:bodyPr wrap="square" rtlCol="0" anchor="ctr">
-            <a:noAutofit/>
-          </a:bodyPr>
-          <a:lstStyle/>
-          <a:p>
-            <a:pPr algn="ctr"/>
-            <a:endParaRPr lang="en-US"/>
-          </a:p>
-        </p:txBody>
-      </p:sp>
-    </p:spTree>
-    <p:extLst>
-      <p:ext uri="{BB962C8B-B14F-4D97-AF65-F5344CB8AC3E}">
-        <p14:creationId xmlns:p14="http://schemas.microsoft.com/office/powerpoint/2010/main" val="678731799"/>
-      </p:ext>
-    </p:extLst>
-  </p:cSld>
-  <p:clrMapOvr>
-    <a:masterClrMapping/>
-  </p:clrMapOvr>
-</p:sld>
-</file>
-
-<file path=ppt/slides/slide15.xml><?xml version="1.0" encoding="utf-8"?>
 <p:sld xmlns:a="http://schemas.openxmlformats.org/drawingml/2006/main" xmlns:r="http://schemas.openxmlformats.org/officeDocument/2006/relationships" xmlns:p="http://schemas.openxmlformats.org/presentationml/2006/main">
   <p:cSld>
     <p:spTree>
@@ -6293,13 +6002,7 @@
       </p:grpSpPr>
       <p:sp>
         <p:nvSpPr>
-          <p:cNvPr id="2" name="Title 1">
-            <a:extLst>
-              <a:ext uri="{FF2B5EF4-FFF2-40B4-BE49-F238E27FC236}">
-                <a16:creationId xmlns:a16="http://schemas.microsoft.com/office/drawing/2014/main" id="{1BD70CD0-7279-34C5-6406-7A07AA8F7A73}"/>
-              </a:ext>
-            </a:extLst>
-          </p:cNvPr>
+          <p:cNvPr id="2" name="Title 1"/>
           <p:cNvSpPr>
             <a:spLocks noGrp="1"/>
           </p:cNvSpPr>
@@ -6326,13 +6029,7 @@
       </p:sp>
       <p:sp>
         <p:nvSpPr>
-          <p:cNvPr id="3" name="Content Placeholder 2">
-            <a:extLst>
-              <a:ext uri="{FF2B5EF4-FFF2-40B4-BE49-F238E27FC236}">
-                <a16:creationId xmlns:a16="http://schemas.microsoft.com/office/drawing/2014/main" id="{14EC5244-9026-2C46-BCBB-B10048E22D9A}"/>
-              </a:ext>
-            </a:extLst>
-          </p:cNvPr>
+          <p:cNvPr id="3" name="Content Placeholder 2"/>
           <p:cNvSpPr>
             <a:spLocks noGrp="1"/>
           </p:cNvSpPr>
@@ -6351,30 +6048,35 @@
               <a:rPr lang="en-US" sz="2400" dirty="0"/>
               <a:t>Data Gathering</a:t>
             </a:r>
+            <a:endParaRPr lang="en-US" sz="2400" dirty="0"/>
           </a:p>
           <a:p>
             <a:r>
               <a:rPr lang="en-US" sz="2400" dirty="0"/>
               <a:t>Data Cleaning</a:t>
             </a:r>
+            <a:endParaRPr lang="en-US" sz="2400" dirty="0"/>
           </a:p>
           <a:p>
             <a:r>
               <a:rPr lang="en-US" sz="2400" dirty="0"/>
               <a:t>Feature Engineering</a:t>
             </a:r>
+            <a:endParaRPr lang="en-US" sz="2400" dirty="0"/>
           </a:p>
           <a:p>
             <a:r>
               <a:rPr lang="en-US" sz="2400" dirty="0"/>
               <a:t>Model Training, Evaluation and Selection</a:t>
             </a:r>
+            <a:endParaRPr lang="en-US" sz="2400" dirty="0"/>
           </a:p>
           <a:p>
             <a:r>
               <a:rPr lang="en-US" sz="2400" dirty="0"/>
               <a:t>Hyperparameter Tunning of best model</a:t>
             </a:r>
+            <a:endParaRPr lang="en-US" sz="2400" dirty="0"/>
           </a:p>
           <a:p>
             <a:r>
@@ -6386,136 +6088,6 @@
         </p:txBody>
       </p:sp>
     </p:spTree>
-    <p:extLst>
-      <p:ext uri="{BB962C8B-B14F-4D97-AF65-F5344CB8AC3E}">
-        <p14:creationId xmlns:p14="http://schemas.microsoft.com/office/powerpoint/2010/main" val="156725385"/>
-      </p:ext>
-    </p:extLst>
-  </p:cSld>
-  <p:clrMapOvr>
-    <a:masterClrMapping/>
-  </p:clrMapOvr>
-</p:sld>
-</file>
-
-<file path=ppt/slides/slide16.xml><?xml version="1.0" encoding="utf-8"?>
-<p:sld xmlns:a="http://schemas.openxmlformats.org/drawingml/2006/main" xmlns:r="http://schemas.openxmlformats.org/officeDocument/2006/relationships" xmlns:p="http://schemas.openxmlformats.org/presentationml/2006/main">
-  <p:cSld>
-    <p:spTree>
-      <p:nvGrpSpPr>
-        <p:cNvPr id="1" name=""/>
-        <p:cNvGrpSpPr/>
-        <p:nvPr/>
-      </p:nvGrpSpPr>
-      <p:grpSpPr>
-        <a:xfrm>
-          <a:off x="0" y="0"/>
-          <a:ext cx="0" cy="0"/>
-          <a:chOff x="0" y="0"/>
-          <a:chExt cx="0" cy="0"/>
-        </a:xfrm>
-      </p:grpSpPr>
-      <p:sp>
-        <p:nvSpPr>
-          <p:cNvPr id="2" name="Title 1">
-            <a:extLst>
-              <a:ext uri="{FF2B5EF4-FFF2-40B4-BE49-F238E27FC236}">
-                <a16:creationId xmlns:a16="http://schemas.microsoft.com/office/drawing/2014/main" id="{1BD70CD0-7279-34C5-6406-7A07AA8F7A73}"/>
-              </a:ext>
-            </a:extLst>
-          </p:cNvPr>
-          <p:cNvSpPr>
-            <a:spLocks noGrp="1"/>
-          </p:cNvSpPr>
-          <p:nvPr>
-            <p:ph type="title"/>
-          </p:nvPr>
-        </p:nvSpPr>
-        <p:spPr/>
-        <p:txBody>
-          <a:bodyPr/>
-          <a:lstStyle/>
-          <a:p>
-            <a:r>
-              <a:rPr lang="en-US" dirty="0"/>
-              <a:t>Technical-Steps involved in </a:t>
-            </a:r>
-            <a:r>
-              <a:rPr lang="en-US" dirty="0" err="1"/>
-              <a:t>MLops</a:t>
-            </a:r>
-            <a:endParaRPr lang="en-US" dirty="0"/>
-          </a:p>
-        </p:txBody>
-      </p:sp>
-      <p:sp>
-        <p:nvSpPr>
-          <p:cNvPr id="3" name="Content Placeholder 2">
-            <a:extLst>
-              <a:ext uri="{FF2B5EF4-FFF2-40B4-BE49-F238E27FC236}">
-                <a16:creationId xmlns:a16="http://schemas.microsoft.com/office/drawing/2014/main" id="{14EC5244-9026-2C46-BCBB-B10048E22D9A}"/>
-              </a:ext>
-            </a:extLst>
-          </p:cNvPr>
-          <p:cNvSpPr>
-            <a:spLocks noGrp="1"/>
-          </p:cNvSpPr>
-          <p:nvPr>
-            <p:ph idx="1"/>
-          </p:nvPr>
-        </p:nvSpPr>
-        <p:spPr/>
-        <p:txBody>
-          <a:bodyPr>
-            <a:normAutofit/>
-          </a:bodyPr>
-          <a:lstStyle/>
-          <a:p>
-            <a:r>
-              <a:rPr lang="en-US" sz="2400" dirty="0"/>
-              <a:t>Developing python API &amp; webapp</a:t>
-            </a:r>
-          </a:p>
-          <a:p>
-            <a:r>
-              <a:rPr lang="en-US" sz="2400" dirty="0"/>
-              <a:t>Setting up version control system</a:t>
-            </a:r>
-          </a:p>
-          <a:p>
-            <a:r>
-              <a:rPr lang="en-US" sz="2400" dirty="0"/>
-              <a:t>Setting up CICD pipeline using </a:t>
-            </a:r>
-            <a:r>
-              <a:rPr lang="en-US" sz="2400" dirty="0" err="1"/>
-              <a:t>github</a:t>
-            </a:r>
-            <a:r>
-              <a:rPr lang="en-US" sz="2400" dirty="0"/>
-              <a:t>-action</a:t>
-            </a:r>
-          </a:p>
-          <a:p>
-            <a:r>
-              <a:rPr lang="en-US" sz="2400" dirty="0"/>
-              <a:t>Setting up Cloud Server to run the app</a:t>
-            </a:r>
-          </a:p>
-          <a:p>
-            <a:r>
-              <a:rPr lang="en-US" sz="2400" dirty="0"/>
-              <a:t>A demo of live app</a:t>
-            </a:r>
-          </a:p>
-        </p:txBody>
-      </p:sp>
-    </p:spTree>
-    <p:extLst>
-      <p:ext uri="{BB962C8B-B14F-4D97-AF65-F5344CB8AC3E}">
-        <p14:creationId xmlns:p14="http://schemas.microsoft.com/office/powerpoint/2010/main" val="2962315630"/>
-      </p:ext>
-    </p:extLst>
   </p:cSld>
   <p:clrMapOvr>
     <a:masterClrMapping/>
@@ -6542,13 +6114,7 @@
       </p:grpSpPr>
       <p:sp>
         <p:nvSpPr>
-          <p:cNvPr id="2" name="Title 1">
-            <a:extLst>
-              <a:ext uri="{FF2B5EF4-FFF2-40B4-BE49-F238E27FC236}">
-                <a16:creationId xmlns:a16="http://schemas.microsoft.com/office/drawing/2014/main" id="{51ACA86B-00FC-9406-29E6-5D2C5767A3D5}"/>
-              </a:ext>
-            </a:extLst>
-          </p:cNvPr>
+          <p:cNvPr id="2" name="Title 1"/>
           <p:cNvSpPr>
             <a:spLocks noGrp="1"/>
           </p:cNvSpPr>
@@ -6556,54 +6122,194 @@
             <p:ph type="title"/>
           </p:nvPr>
         </p:nvSpPr>
+        <p:spPr/>
+        <p:txBody>
+          <a:bodyPr/>
+          <a:lstStyle/>
+          <a:p>
+            <a:r>
+              <a:rPr lang="en-US" dirty="0"/>
+              <a:t>What problem is this project trying to solve?</a:t>
+            </a:r>
+            <a:endParaRPr lang="en-US" dirty="0"/>
+          </a:p>
+        </p:txBody>
+      </p:sp>
+      <p:pic>
+        <p:nvPicPr>
+          <p:cNvPr id="7" name="Picture 6"/>
+          <p:cNvPicPr>
+            <a:picLocks noChangeAspect="1"/>
+          </p:cNvPicPr>
+          <p:nvPr/>
+        </p:nvPicPr>
+        <p:blipFill>
+          <a:blip r:embed="rId1"/>
+          <a:stretch>
+            <a:fillRect/>
+          </a:stretch>
+        </p:blipFill>
         <p:spPr>
           <a:xfrm>
-            <a:off x="567159" y="447188"/>
-            <a:ext cx="11192719" cy="970450"/>
+            <a:off x="1626870" y="2635885"/>
+            <a:ext cx="2190750" cy="1419225"/>
           </a:xfrm>
+          <a:prstGeom prst="rect">
+            <a:avLst/>
+          </a:prstGeom>
         </p:spPr>
-        <p:txBody>
-          <a:bodyPr/>
-          <a:lstStyle/>
-          <a:p>
-            <a:r>
-              <a:rPr lang="en-US" dirty="0"/>
-              <a:t>What problem is this project trying to solve?</a:t>
-            </a:r>
-          </a:p>
-        </p:txBody>
-      </p:sp>
-      <p:sp>
-        <p:nvSpPr>
-          <p:cNvPr id="3" name="Content Placeholder 2">
-            <a:extLst>
-              <a:ext uri="{FF2B5EF4-FFF2-40B4-BE49-F238E27FC236}">
-                <a16:creationId xmlns:a16="http://schemas.microsoft.com/office/drawing/2014/main" id="{8B68DB56-83F5-8586-0A70-D90CA3FA508F}"/>
-              </a:ext>
-            </a:extLst>
-          </p:cNvPr>
-          <p:cNvSpPr>
-            <a:spLocks noGrp="1"/>
-          </p:cNvSpPr>
-          <p:nvPr>
-            <p:ph idx="1"/>
-          </p:nvPr>
-        </p:nvSpPr>
-        <p:spPr/>
-        <p:txBody>
-          <a:bodyPr/>
-          <a:lstStyle/>
-          <a:p>
-            <a:endParaRPr lang="en-US" dirty="0"/>
-          </a:p>
-        </p:txBody>
-      </p:sp>
+      </p:pic>
+      <p:pic>
+        <p:nvPicPr>
+          <p:cNvPr id="9" name="Content Placeholder 8"/>
+          <p:cNvPicPr>
+            <a:picLocks noChangeAspect="1"/>
+          </p:cNvPicPr>
+          <p:nvPr>
+            <p:ph sz="half" idx="1"/>
+          </p:nvPr>
+        </p:nvPicPr>
+        <p:blipFill>
+          <a:blip r:embed="rId2"/>
+          <a:stretch>
+            <a:fillRect/>
+          </a:stretch>
+        </p:blipFill>
+        <p:spPr>
+          <a:xfrm>
+            <a:off x="1626870" y="4687570"/>
+            <a:ext cx="2167255" cy="908685"/>
+          </a:xfrm>
+          <a:prstGeom prst="rect">
+            <a:avLst/>
+          </a:prstGeom>
+        </p:spPr>
+      </p:pic>
+      <p:cxnSp>
+        <p:nvCxnSpPr>
+          <p:cNvPr id="12" name="Straight Arrow Connector 11"/>
+          <p:cNvCxnSpPr/>
+          <p:nvPr/>
+        </p:nvCxnSpPr>
+        <p:spPr>
+          <a:xfrm flipV="1">
+            <a:off x="4327525" y="5117465"/>
+            <a:ext cx="2111375" cy="17145"/>
+          </a:xfrm>
+          <a:prstGeom prst="straightConnector1">
+            <a:avLst/>
+          </a:prstGeom>
+          <a:ln>
+            <a:tailEnd type="arrow"/>
+          </a:ln>
+        </p:spPr>
+        <p:style>
+          <a:lnRef idx="2">
+            <a:schemeClr val="accent1"/>
+          </a:lnRef>
+          <a:fillRef idx="0">
+            <a:srgbClr val="FFFFFF"/>
+          </a:fillRef>
+          <a:effectRef idx="0">
+            <a:srgbClr val="FFFFFF"/>
+          </a:effectRef>
+          <a:fontRef idx="minor">
+            <a:schemeClr val="tx1"/>
+          </a:fontRef>
+        </p:style>
+      </p:cxnSp>
+      <p:sp>
+        <p:nvSpPr>
+          <p:cNvPr id="13" name="Text Box 12"/>
+          <p:cNvSpPr txBox="1"/>
+          <p:nvPr/>
+        </p:nvSpPr>
+        <p:spPr>
+          <a:xfrm>
+            <a:off x="6972300" y="4958080"/>
+            <a:ext cx="4064000" cy="368300"/>
+          </a:xfrm>
+          <a:prstGeom prst="rect">
+            <a:avLst/>
+          </a:prstGeom>
+          <a:noFill/>
+        </p:spPr>
+        <p:txBody>
+          <a:bodyPr wrap="square" rtlCol="0">
+            <a:spAutoFit/>
+          </a:bodyPr>
+          <a:p>
+            <a:r>
+              <a:rPr lang="en-GB" altLang="en-US"/>
+              <a:t>Not Spam</a:t>
+            </a:r>
+            <a:endParaRPr lang="en-GB" altLang="en-US"/>
+          </a:p>
+        </p:txBody>
+      </p:sp>
+      <p:sp>
+        <p:nvSpPr>
+          <p:cNvPr id="14" name="Text Box 13"/>
+          <p:cNvSpPr txBox="1"/>
+          <p:nvPr/>
+        </p:nvSpPr>
+        <p:spPr>
+          <a:xfrm>
+            <a:off x="6972300" y="3161665"/>
+            <a:ext cx="4064000" cy="368300"/>
+          </a:xfrm>
+          <a:prstGeom prst="rect">
+            <a:avLst/>
+          </a:prstGeom>
+          <a:noFill/>
+        </p:spPr>
+        <p:txBody>
+          <a:bodyPr wrap="square" rtlCol="0">
+            <a:spAutoFit/>
+          </a:bodyPr>
+          <a:p>
+            <a:r>
+              <a:rPr lang="en-GB" altLang="en-US"/>
+              <a:t>Spam</a:t>
+            </a:r>
+            <a:endParaRPr lang="en-GB" altLang="en-US"/>
+          </a:p>
+        </p:txBody>
+      </p:sp>
+      <p:cxnSp>
+        <p:nvCxnSpPr>
+          <p:cNvPr id="15" name="Straight Arrow Connector 14"/>
+          <p:cNvCxnSpPr/>
+          <p:nvPr/>
+        </p:nvCxnSpPr>
+        <p:spPr>
+          <a:xfrm flipV="1">
+            <a:off x="4338955" y="3335020"/>
+            <a:ext cx="2111375" cy="17145"/>
+          </a:xfrm>
+          <a:prstGeom prst="straightConnector1">
+            <a:avLst/>
+          </a:prstGeom>
+          <a:ln>
+            <a:tailEnd type="arrow"/>
+          </a:ln>
+        </p:spPr>
+        <p:style>
+          <a:lnRef idx="2">
+            <a:schemeClr val="accent1"/>
+          </a:lnRef>
+          <a:fillRef idx="0">
+            <a:srgbClr val="FFFFFF"/>
+          </a:fillRef>
+          <a:effectRef idx="0">
+            <a:srgbClr val="FFFFFF"/>
+          </a:effectRef>
+          <a:fontRef idx="minor">
+            <a:schemeClr val="tx1"/>
+          </a:fontRef>
+        </p:style>
+      </p:cxnSp>
     </p:spTree>
-    <p:extLst>
-      <p:ext uri="{BB962C8B-B14F-4D97-AF65-F5344CB8AC3E}">
-        <p14:creationId xmlns:p14="http://schemas.microsoft.com/office/powerpoint/2010/main" val="3951928977"/>
-      </p:ext>
-    </p:extLst>
   </p:cSld>
   <p:clrMapOvr>
     <a:masterClrMapping/>
@@ -6630,13 +6336,7 @@
       </p:grpSpPr>
       <p:sp>
         <p:nvSpPr>
-          <p:cNvPr id="2" name="Title 1">
-            <a:extLst>
-              <a:ext uri="{FF2B5EF4-FFF2-40B4-BE49-F238E27FC236}">
-                <a16:creationId xmlns:a16="http://schemas.microsoft.com/office/drawing/2014/main" id="{51ACA86B-00FC-9406-29E6-5D2C5767A3D5}"/>
-              </a:ext>
-            </a:extLst>
-          </p:cNvPr>
+          <p:cNvPr id="2" name="Title 1"/>
           <p:cNvSpPr>
             <a:spLocks noGrp="1"/>
           </p:cNvSpPr>
@@ -6653,18 +6353,13 @@
               <a:rPr lang="en-US" dirty="0"/>
               <a:t>Where did I get the data from?</a:t>
             </a:r>
-          </a:p>
-        </p:txBody>
-      </p:sp>
-      <p:sp>
-        <p:nvSpPr>
-          <p:cNvPr id="3" name="Content Placeholder 2">
-            <a:extLst>
-              <a:ext uri="{FF2B5EF4-FFF2-40B4-BE49-F238E27FC236}">
-                <a16:creationId xmlns:a16="http://schemas.microsoft.com/office/drawing/2014/main" id="{8B68DB56-83F5-8586-0A70-D90CA3FA508F}"/>
-              </a:ext>
-            </a:extLst>
-          </p:cNvPr>
+            <a:endParaRPr lang="en-US" dirty="0"/>
+          </a:p>
+        </p:txBody>
+      </p:sp>
+      <p:sp>
+        <p:nvSpPr>
+          <p:cNvPr id="3" name="Content Placeholder 2"/>
           <p:cNvSpPr>
             <a:spLocks noGrp="1"/>
           </p:cNvSpPr>
@@ -6677,16 +6372,59 @@
           <a:bodyPr/>
           <a:lstStyle/>
           <a:p>
-            <a:endParaRPr lang="en-US"/>
+            <a:r>
+              <a:rPr lang="en-US"/>
+              <a:t>This corpus has been collected from free </a:t>
+            </a:r>
+            <a:r>
+              <a:rPr lang="en-GB" altLang="en-US"/>
+              <a:t>or </a:t>
+            </a:r>
+            <a:r>
+              <a:rPr lang="en-US"/>
+              <a:t>free for research sources at the Internet</a:t>
+            </a:r>
+            <a:r>
+              <a:rPr lang="en-GB" altLang="en-US"/>
+              <a:t>:</a:t>
+            </a:r>
+            <a:endParaRPr lang="en-GB" altLang="en-US"/>
+          </a:p>
+          <a:p>
+            <a:pPr lvl="1"/>
+            <a:r>
+              <a:rPr lang="en-GB" altLang="en-US"/>
+              <a:t>UK forum</a:t>
+            </a:r>
+            <a:endParaRPr lang="en-GB" altLang="en-US"/>
+          </a:p>
+          <a:p>
+            <a:pPr lvl="1"/>
+            <a:r>
+              <a:rPr lang="en-GB" altLang="en-US"/>
+              <a:t>NUS SMS Corpus (Research dept. of singapore)</a:t>
+            </a:r>
+            <a:endParaRPr lang="en-GB" altLang="en-US"/>
+          </a:p>
+          <a:p>
+            <a:pPr lvl="1"/>
+            <a:r>
+              <a:rPr lang="en-GB" altLang="en-US"/>
+              <a:t>Caroline Tag's PhD Thesis</a:t>
+            </a:r>
+            <a:endParaRPr lang="en-GB" altLang="en-US"/>
+          </a:p>
+          <a:p>
+            <a:pPr lvl="1"/>
+            <a:r>
+              <a:rPr lang="en-GB" altLang="en-US"/>
+              <a:t>source available for academic researches</a:t>
+            </a:r>
+            <a:endParaRPr lang="en-GB" altLang="en-US"/>
           </a:p>
         </p:txBody>
       </p:sp>
     </p:spTree>
-    <p:extLst>
-      <p:ext uri="{BB962C8B-B14F-4D97-AF65-F5344CB8AC3E}">
-        <p14:creationId xmlns:p14="http://schemas.microsoft.com/office/powerpoint/2010/main" val="3712495652"/>
-      </p:ext>
-    </p:extLst>
   </p:cSld>
   <p:clrMapOvr>
     <a:masterClrMapping/>
@@ -6703,78 +6441,43 @@
         <p:cNvGrpSpPr/>
         <p:nvPr/>
       </p:nvGrpSpPr>
-      <p:grpSpPr>
-        <a:xfrm>
-          <a:off x="0" y="0"/>
-          <a:ext cx="0" cy="0"/>
-          <a:chOff x="0" y="0"/>
-          <a:chExt cx="0" cy="0"/>
-        </a:xfrm>
-      </p:grpSpPr>
-      <p:sp>
-        <p:nvSpPr>
-          <p:cNvPr id="2" name="Title 1">
-            <a:extLst>
-              <a:ext uri="{FF2B5EF4-FFF2-40B4-BE49-F238E27FC236}">
-                <a16:creationId xmlns:a16="http://schemas.microsoft.com/office/drawing/2014/main" id="{51ACA86B-00FC-9406-29E6-5D2C5767A3D5}"/>
-              </a:ext>
-            </a:extLst>
-          </p:cNvPr>
-          <p:cNvSpPr>
-            <a:spLocks noGrp="1"/>
-          </p:cNvSpPr>
-          <p:nvPr>
-            <p:ph type="title"/>
-          </p:nvPr>
-        </p:nvSpPr>
+      <p:grpSpPr/>
+      <p:pic>
+        <p:nvPicPr>
+          <p:cNvPr id="4" name="Content Placeholder 3"/>
+          <p:cNvPicPr>
+            <a:picLocks noChangeAspect="1"/>
+          </p:cNvPicPr>
+          <p:nvPr>
+            <p:custDataLst>
+              <p:tags r:id="rId1"/>
+            </p:custDataLst>
+          </p:nvPr>
+        </p:nvPicPr>
+        <p:blipFill>
+          <a:blip r:embed="rId2"/>
+          <a:stretch>
+            <a:fillRect/>
+          </a:stretch>
+        </p:blipFill>
         <p:spPr>
           <a:xfrm>
-            <a:off x="809999" y="447188"/>
-            <a:ext cx="11806406" cy="970450"/>
+            <a:off x="781050" y="528955"/>
+            <a:ext cx="7480300" cy="5673090"/>
           </a:xfrm>
+          <a:prstGeom prst="rect">
+            <a:avLst/>
+          </a:prstGeom>
+          <a:effectLst>
+            <a:outerShdw blurRad="50800" dir="14400000">
+              <a:srgbClr val="000000">
+                <a:alpha val="40000"/>
+              </a:srgbClr>
+            </a:outerShdw>
+          </a:effectLst>
         </p:spPr>
-        <p:txBody>
-          <a:bodyPr/>
-          <a:lstStyle/>
-          <a:p>
-            <a:r>
-              <a:rPr lang="en-US" dirty="0"/>
-              <a:t>was the gathered data was good enough?</a:t>
-            </a:r>
-          </a:p>
-        </p:txBody>
-      </p:sp>
-      <p:sp>
-        <p:nvSpPr>
-          <p:cNvPr id="3" name="Content Placeholder 2">
-            <a:extLst>
-              <a:ext uri="{FF2B5EF4-FFF2-40B4-BE49-F238E27FC236}">
-                <a16:creationId xmlns:a16="http://schemas.microsoft.com/office/drawing/2014/main" id="{8B68DB56-83F5-8586-0A70-D90CA3FA508F}"/>
-              </a:ext>
-            </a:extLst>
-          </p:cNvPr>
-          <p:cNvSpPr>
-            <a:spLocks noGrp="1"/>
-          </p:cNvSpPr>
-          <p:nvPr>
-            <p:ph idx="1"/>
-          </p:nvPr>
-        </p:nvSpPr>
-        <p:spPr/>
-        <p:txBody>
-          <a:bodyPr/>
-          <a:lstStyle/>
-          <a:p>
-            <a:endParaRPr lang="en-US"/>
-          </a:p>
-        </p:txBody>
-      </p:sp>
+      </p:pic>
     </p:spTree>
-    <p:extLst>
-      <p:ext uri="{BB962C8B-B14F-4D97-AF65-F5344CB8AC3E}">
-        <p14:creationId xmlns:p14="http://schemas.microsoft.com/office/powerpoint/2010/main" val="2539512182"/>
-      </p:ext>
-    </p:extLst>
   </p:cSld>
   <p:clrMapOvr>
     <a:masterClrMapping/>
@@ -6791,78 +6494,37 @@
         <p:cNvGrpSpPr/>
         <p:nvPr/>
       </p:nvGrpSpPr>
-      <p:grpSpPr>
-        <a:xfrm>
-          <a:off x="0" y="0"/>
-          <a:ext cx="0" cy="0"/>
-          <a:chOff x="0" y="0"/>
-          <a:chExt cx="0" cy="0"/>
-        </a:xfrm>
-      </p:grpSpPr>
-      <p:sp>
-        <p:nvSpPr>
-          <p:cNvPr id="2" name="Title 1">
-            <a:extLst>
-              <a:ext uri="{FF2B5EF4-FFF2-40B4-BE49-F238E27FC236}">
-                <a16:creationId xmlns:a16="http://schemas.microsoft.com/office/drawing/2014/main" id="{51ACA86B-00FC-9406-29E6-5D2C5767A3D5}"/>
-              </a:ext>
-            </a:extLst>
-          </p:cNvPr>
-          <p:cNvSpPr>
-            <a:spLocks noGrp="1"/>
-          </p:cNvSpPr>
-          <p:nvPr>
-            <p:ph type="title"/>
-          </p:nvPr>
-        </p:nvSpPr>
+      <p:grpSpPr/>
+      <p:pic>
+        <p:nvPicPr>
+          <p:cNvPr id="2" name="Content Placeholder 3"/>
+          <p:cNvPicPr>
+            <a:picLocks noChangeAspect="1"/>
+          </p:cNvPicPr>
+          <p:nvPr>
+            <p:custDataLst>
+              <p:tags r:id="rId1"/>
+            </p:custDataLst>
+          </p:nvPr>
+        </p:nvPicPr>
+        <p:blipFill>
+          <a:blip r:embed="rId2"/>
+          <a:stretch>
+            <a:fillRect/>
+          </a:stretch>
+        </p:blipFill>
         <p:spPr>
           <a:xfrm>
-            <a:off x="809999" y="447188"/>
-            <a:ext cx="11806406" cy="970450"/>
+            <a:off x="571500" y="619125"/>
+            <a:ext cx="7412355" cy="5621020"/>
           </a:xfrm>
+          <a:prstGeom prst="rect">
+            <a:avLst/>
+          </a:prstGeom>
+          <a:effectLst/>
         </p:spPr>
-        <p:txBody>
-          <a:bodyPr/>
-          <a:lstStyle/>
-          <a:p>
-            <a:r>
-              <a:rPr lang="en-US" dirty="0"/>
-              <a:t>Useful findings from data analysis</a:t>
-            </a:r>
-          </a:p>
-        </p:txBody>
-      </p:sp>
-      <p:sp>
-        <p:nvSpPr>
-          <p:cNvPr id="3" name="Content Placeholder 2">
-            <a:extLst>
-              <a:ext uri="{FF2B5EF4-FFF2-40B4-BE49-F238E27FC236}">
-                <a16:creationId xmlns:a16="http://schemas.microsoft.com/office/drawing/2014/main" id="{8B68DB56-83F5-8586-0A70-D90CA3FA508F}"/>
-              </a:ext>
-            </a:extLst>
-          </p:cNvPr>
-          <p:cNvSpPr>
-            <a:spLocks noGrp="1"/>
-          </p:cNvSpPr>
-          <p:nvPr>
-            <p:ph idx="1"/>
-          </p:nvPr>
-        </p:nvSpPr>
-        <p:spPr/>
-        <p:txBody>
-          <a:bodyPr/>
-          <a:lstStyle/>
-          <a:p>
-            <a:endParaRPr lang="en-US"/>
-          </a:p>
-        </p:txBody>
-      </p:sp>
+      </p:pic>
     </p:spTree>
-    <p:extLst>
-      <p:ext uri="{BB962C8B-B14F-4D97-AF65-F5344CB8AC3E}">
-        <p14:creationId xmlns:p14="http://schemas.microsoft.com/office/powerpoint/2010/main" val="3202762271"/>
-      </p:ext>
-    </p:extLst>
   </p:cSld>
   <p:clrMapOvr>
     <a:masterClrMapping/>
@@ -6873,14 +6535,200 @@
 <file path=ppt/slides/slide6.xml><?xml version="1.0" encoding="utf-8"?>
 <p:sld xmlns:a="http://schemas.openxmlformats.org/drawingml/2006/main" xmlns:r="http://schemas.openxmlformats.org/officeDocument/2006/relationships" xmlns:p="http://schemas.openxmlformats.org/presentationml/2006/main">
   <p:cSld>
-    <p:bg>
-      <p:bgPr>
-        <a:solidFill>
-          <a:schemeClr val="bg2"/>
-        </a:solidFill>
-        <a:effectLst/>
-      </p:bgPr>
-    </p:bg>
+    <p:spTree>
+      <p:nvGrpSpPr>
+        <p:cNvPr id="1" name=""/>
+        <p:cNvGrpSpPr/>
+        <p:nvPr/>
+      </p:nvGrpSpPr>
+      <p:grpSpPr/>
+      <p:pic>
+        <p:nvPicPr>
+          <p:cNvPr id="2" name="Content Placeholder 3"/>
+          <p:cNvPicPr>
+            <a:picLocks noChangeAspect="1"/>
+          </p:cNvPicPr>
+          <p:nvPr>
+            <p:custDataLst>
+              <p:tags r:id="rId1"/>
+            </p:custDataLst>
+          </p:nvPr>
+        </p:nvPicPr>
+        <p:blipFill>
+          <a:blip r:embed="rId2"/>
+          <a:stretch>
+            <a:fillRect/>
+          </a:stretch>
+        </p:blipFill>
+        <p:spPr>
+          <a:xfrm>
+            <a:off x="701040" y="628015"/>
+            <a:ext cx="7433945" cy="5537200"/>
+          </a:xfrm>
+          <a:prstGeom prst="rect">
+            <a:avLst/>
+          </a:prstGeom>
+          <a:effectLst/>
+        </p:spPr>
+      </p:pic>
+    </p:spTree>
+  </p:cSld>
+  <p:clrMapOvr>
+    <a:masterClrMapping/>
+  </p:clrMapOvr>
+</p:sld>
+</file>
+
+<file path=ppt/slides/slide7.xml><?xml version="1.0" encoding="utf-8"?>
+<p:sld xmlns:a="http://schemas.openxmlformats.org/drawingml/2006/main" xmlns:r="http://schemas.openxmlformats.org/officeDocument/2006/relationships" xmlns:p="http://schemas.openxmlformats.org/presentationml/2006/main">
+  <p:cSld>
+    <p:spTree>
+      <p:nvGrpSpPr>
+        <p:cNvPr id="1" name=""/>
+        <p:cNvGrpSpPr/>
+        <p:nvPr/>
+      </p:nvGrpSpPr>
+      <p:grpSpPr/>
+      <p:sp>
+        <p:nvSpPr>
+          <p:cNvPr id="6" name="Title 5"/>
+          <p:cNvSpPr>
+            <a:spLocks noGrp="1"/>
+          </p:cNvSpPr>
+          <p:nvPr>
+            <p:ph type="title"/>
+          </p:nvPr>
+        </p:nvSpPr>
+        <p:spPr/>
+        <p:txBody>
+          <a:bodyPr/>
+          <a:p>
+            <a:r>
+              <a:rPr lang="en-GB" altLang="en-US"/>
+              <a:t>Relationship between input features</a:t>
+            </a:r>
+            <a:endParaRPr lang="en-GB" altLang="en-US"/>
+          </a:p>
+        </p:txBody>
+      </p:sp>
+      <p:pic>
+        <p:nvPicPr>
+          <p:cNvPr id="5" name="Content Placeholder 3"/>
+          <p:cNvPicPr>
+            <a:picLocks noChangeAspect="1"/>
+          </p:cNvPicPr>
+          <p:nvPr>
+            <p:ph idx="1"/>
+            <p:custDataLst>
+              <p:tags r:id="rId1"/>
+            </p:custDataLst>
+          </p:nvPr>
+        </p:nvPicPr>
+        <p:blipFill>
+          <a:blip r:embed="rId2"/>
+          <a:stretch>
+            <a:fillRect/>
+          </a:stretch>
+        </p:blipFill>
+        <p:spPr>
+          <a:xfrm>
+            <a:off x="643255" y="2332990"/>
+            <a:ext cx="4528820" cy="4164330"/>
+          </a:xfrm>
+          <a:prstGeom prst="rect">
+            <a:avLst/>
+          </a:prstGeom>
+          <a:effectLst>
+            <a:outerShdw blurRad="50800" dir="14400000">
+              <a:srgbClr val="000000">
+                <a:alpha val="40000"/>
+              </a:srgbClr>
+            </a:outerShdw>
+          </a:effectLst>
+        </p:spPr>
+      </p:pic>
+    </p:spTree>
+  </p:cSld>
+  <p:clrMapOvr>
+    <a:masterClrMapping/>
+  </p:clrMapOvr>
+</p:sld>
+</file>
+
+<file path=ppt/slides/slide8.xml><?xml version="1.0" encoding="utf-8"?>
+<p:sld xmlns:a="http://schemas.openxmlformats.org/drawingml/2006/main" xmlns:r="http://schemas.openxmlformats.org/officeDocument/2006/relationships" xmlns:p="http://schemas.openxmlformats.org/presentationml/2006/main">
+  <p:cSld>
+    <p:spTree>
+      <p:nvGrpSpPr>
+        <p:cNvPr id="1" name=""/>
+        <p:cNvGrpSpPr/>
+        <p:nvPr/>
+      </p:nvGrpSpPr>
+      <p:grpSpPr/>
+      <p:sp>
+        <p:nvSpPr>
+          <p:cNvPr id="2" name="Title 1"/>
+          <p:cNvSpPr>
+            <a:spLocks noGrp="1"/>
+          </p:cNvSpPr>
+          <p:nvPr>
+            <p:ph type="title"/>
+          </p:nvPr>
+        </p:nvSpPr>
+        <p:spPr/>
+        <p:txBody>
+          <a:bodyPr/>
+          <a:p>
+            <a:r>
+              <a:rPr lang="en-GB" altLang="en-US">
+                <a:sym typeface="+mn-ea"/>
+              </a:rPr>
+              <a:t>Correlation between input features</a:t>
+            </a:r>
+            <a:endParaRPr lang="en-US"/>
+          </a:p>
+        </p:txBody>
+      </p:sp>
+      <p:pic>
+        <p:nvPicPr>
+          <p:cNvPr id="4" name="Content Placeholder 3"/>
+          <p:cNvPicPr>
+            <a:picLocks noChangeAspect="1"/>
+          </p:cNvPicPr>
+          <p:nvPr>
+            <p:ph idx="1"/>
+            <p:custDataLst>
+              <p:tags r:id="rId1"/>
+            </p:custDataLst>
+          </p:nvPr>
+        </p:nvPicPr>
+        <p:blipFill>
+          <a:blip r:embed="rId2"/>
+          <a:stretch>
+            <a:fillRect/>
+          </a:stretch>
+        </p:blipFill>
+        <p:spPr>
+          <a:xfrm>
+            <a:off x="810260" y="2536825"/>
+            <a:ext cx="5332095" cy="3636010"/>
+          </a:xfrm>
+          <a:prstGeom prst="rect">
+            <a:avLst/>
+          </a:prstGeom>
+        </p:spPr>
+      </p:pic>
+    </p:spTree>
+  </p:cSld>
+  <p:clrMapOvr>
+    <a:masterClrMapping/>
+  </p:clrMapOvr>
+</p:sld>
+</file>
+
+<file path=ppt/slides/slide9.xml><?xml version="1.0" encoding="utf-8"?>
+<p:sld xmlns:a="http://schemas.openxmlformats.org/drawingml/2006/main" xmlns:r="http://schemas.openxmlformats.org/officeDocument/2006/relationships" xmlns:p="http://schemas.openxmlformats.org/presentationml/2006/main">
+  <p:cSld>
     <p:spTree>
       <p:nvGrpSpPr>
         <p:cNvPr id="1" name=""/>
@@ -6897,13 +6745,7 @@
       </p:grpSpPr>
       <p:sp>
         <p:nvSpPr>
-          <p:cNvPr id="2" name="Title 1">
-            <a:extLst>
-              <a:ext uri="{FF2B5EF4-FFF2-40B4-BE49-F238E27FC236}">
-                <a16:creationId xmlns:a16="http://schemas.microsoft.com/office/drawing/2014/main" id="{5B8D88AE-13EE-0391-3C70-94F854004867}"/>
-              </a:ext>
-            </a:extLst>
-          </p:cNvPr>
+          <p:cNvPr id="2" name="Title 1"/>
           <p:cNvSpPr>
             <a:spLocks noGrp="1"/>
           </p:cNvSpPr>
@@ -6913,65 +6755,52 @@
         </p:nvSpPr>
         <p:spPr>
           <a:xfrm>
-            <a:off x="965200" y="1218476"/>
-            <a:ext cx="3187318" cy="4421050"/>
+            <a:off x="809999" y="447188"/>
+            <a:ext cx="11806406" cy="970450"/>
           </a:xfrm>
-          <a:effectLst/>
         </p:spPr>
         <p:txBody>
-          <a:bodyPr anchor="ctr">
-            <a:normAutofit/>
-          </a:bodyPr>
-          <a:lstStyle/>
-          <a:p>
-            <a:pPr algn="r"/>
-            <a:endParaRPr lang="en-US" sz="3200">
-              <a:solidFill>
-                <a:schemeClr val="tx1"/>
-              </a:solidFill>
-            </a:endParaRPr>
-          </a:p>
-        </p:txBody>
-      </p:sp>
-      <p:sp>
-        <p:nvSpPr>
-          <p:cNvPr id="3" name="Content Placeholder 2">
-            <a:extLst>
-              <a:ext uri="{FF2B5EF4-FFF2-40B4-BE49-F238E27FC236}">
-                <a16:creationId xmlns:a16="http://schemas.microsoft.com/office/drawing/2014/main" id="{5098C138-4C4C-14F8-F0B2-9F50DDE6B718}"/>
-              </a:ext>
-            </a:extLst>
-          </p:cNvPr>
-          <p:cNvSpPr>
-            <a:spLocks noGrp="1"/>
-          </p:cNvSpPr>
+          <a:bodyPr/>
+          <a:lstStyle/>
+          <a:p>
+            <a:r>
+              <a:rPr lang="en-GB" altLang="en-US" dirty="0"/>
+              <a:t>What words do messages contain?</a:t>
+            </a:r>
+            <a:endParaRPr lang="en-GB" altLang="en-US" dirty="0"/>
+          </a:p>
+        </p:txBody>
+      </p:sp>
+      <p:pic>
+        <p:nvPicPr>
+          <p:cNvPr id="4" name="Content Placeholder 3"/>
+          <p:cNvPicPr>
+            <a:picLocks noChangeAspect="1"/>
+          </p:cNvPicPr>
           <p:nvPr>
             <p:ph idx="1"/>
-          </p:nvPr>
-        </p:nvSpPr>
+            <p:custDataLst>
+              <p:tags r:id="rId1"/>
+            </p:custDataLst>
+          </p:nvPr>
+        </p:nvPicPr>
+        <p:blipFill>
+          <a:blip r:embed="rId2"/>
+          <a:stretch>
+            <a:fillRect/>
+          </a:stretch>
+        </p:blipFill>
         <p:spPr>
           <a:xfrm>
-            <a:off x="5146751" y="1218475"/>
-            <a:ext cx="6080050" cy="4421051"/>
+            <a:off x="810260" y="2352040"/>
+            <a:ext cx="10118090" cy="4062730"/>
           </a:xfrm>
-          <a:effectLst/>
+          <a:prstGeom prst="rect">
+            <a:avLst/>
+          </a:prstGeom>
         </p:spPr>
-        <p:txBody>
-          <a:bodyPr>
-            <a:normAutofit/>
-          </a:bodyPr>
-          <a:lstStyle/>
-          <a:p>
-            <a:endParaRPr lang="en-US" sz="1600"/>
-          </a:p>
-        </p:txBody>
-      </p:sp>
+      </p:pic>
     </p:spTree>
-    <p:extLst>
-      <p:ext uri="{BB962C8B-B14F-4D97-AF65-F5344CB8AC3E}">
-        <p14:creationId xmlns:p14="http://schemas.microsoft.com/office/powerpoint/2010/main" val="1100166014"/>
-      </p:ext>
-    </p:extLst>
   </p:cSld>
   <p:clrMapOvr>
     <a:masterClrMapping/>
@@ -6979,331 +6808,52 @@
 </p:sld>
 </file>
 
-<file path=ppt/slides/slide7.xml><?xml version="1.0" encoding="utf-8"?>
-<p:sld xmlns:a="http://schemas.openxmlformats.org/drawingml/2006/main" xmlns:r="http://schemas.openxmlformats.org/officeDocument/2006/relationships" xmlns:p="http://schemas.openxmlformats.org/presentationml/2006/main">
-  <p:cSld>
-    <p:bg>
-      <p:bgPr>
-        <a:solidFill>
-          <a:schemeClr val="bg2"/>
-        </a:solidFill>
-        <a:effectLst/>
-      </p:bgPr>
-    </p:bg>
-    <p:spTree>
-      <p:nvGrpSpPr>
-        <p:cNvPr id="1" name=""/>
-        <p:cNvGrpSpPr/>
-        <p:nvPr/>
-      </p:nvGrpSpPr>
-      <p:grpSpPr>
-        <a:xfrm>
-          <a:off x="0" y="0"/>
-          <a:ext cx="0" cy="0"/>
-          <a:chOff x="0" y="0"/>
-          <a:chExt cx="0" cy="0"/>
-        </a:xfrm>
-      </p:grpSpPr>
-      <p:sp>
-        <p:nvSpPr>
-          <p:cNvPr id="2" name="Title 1">
-            <a:extLst>
-              <a:ext uri="{FF2B5EF4-FFF2-40B4-BE49-F238E27FC236}">
-                <a16:creationId xmlns:a16="http://schemas.microsoft.com/office/drawing/2014/main" id="{5B8D88AE-13EE-0391-3C70-94F854004867}"/>
-              </a:ext>
-            </a:extLst>
-          </p:cNvPr>
-          <p:cNvSpPr>
-            <a:spLocks noGrp="1"/>
-          </p:cNvSpPr>
-          <p:nvPr>
-            <p:ph type="title"/>
-          </p:nvPr>
-        </p:nvSpPr>
-        <p:spPr>
-          <a:xfrm>
-            <a:off x="965200" y="1218476"/>
-            <a:ext cx="3187318" cy="4421050"/>
-          </a:xfrm>
-          <a:effectLst/>
-        </p:spPr>
-        <p:txBody>
-          <a:bodyPr anchor="ctr">
-            <a:normAutofit/>
-          </a:bodyPr>
-          <a:lstStyle/>
-          <a:p>
-            <a:pPr algn="r"/>
-            <a:endParaRPr lang="en-US" sz="3200">
-              <a:solidFill>
-                <a:schemeClr val="tx1"/>
-              </a:solidFill>
-            </a:endParaRPr>
-          </a:p>
-        </p:txBody>
-      </p:sp>
-      <p:sp>
-        <p:nvSpPr>
-          <p:cNvPr id="3" name="Content Placeholder 2">
-            <a:extLst>
-              <a:ext uri="{FF2B5EF4-FFF2-40B4-BE49-F238E27FC236}">
-                <a16:creationId xmlns:a16="http://schemas.microsoft.com/office/drawing/2014/main" id="{5098C138-4C4C-14F8-F0B2-9F50DDE6B718}"/>
-              </a:ext>
-            </a:extLst>
-          </p:cNvPr>
-          <p:cNvSpPr>
-            <a:spLocks noGrp="1"/>
-          </p:cNvSpPr>
-          <p:nvPr>
-            <p:ph idx="1"/>
-          </p:nvPr>
-        </p:nvSpPr>
-        <p:spPr>
-          <a:xfrm>
-            <a:off x="5146751" y="1218475"/>
-            <a:ext cx="6080050" cy="4421051"/>
-          </a:xfrm>
-          <a:effectLst/>
-        </p:spPr>
-        <p:txBody>
-          <a:bodyPr>
-            <a:normAutofit/>
-          </a:bodyPr>
-          <a:lstStyle/>
-          <a:p>
-            <a:endParaRPr lang="en-US" sz="1600"/>
-          </a:p>
-        </p:txBody>
-      </p:sp>
-    </p:spTree>
-    <p:extLst>
-      <p:ext uri="{BB962C8B-B14F-4D97-AF65-F5344CB8AC3E}">
-        <p14:creationId xmlns:p14="http://schemas.microsoft.com/office/powerpoint/2010/main" val="2661983360"/>
-      </p:ext>
-    </p:extLst>
-  </p:cSld>
-  <p:clrMapOvr>
-    <a:masterClrMapping/>
-  </p:clrMapOvr>
-</p:sld>
+<file path=ppt/tags/tag1.xml><?xml version="1.0" encoding="utf-8"?>
+<p:tagLst xmlns:p="http://schemas.openxmlformats.org/presentationml/2006/main">
+  <p:tag name="KSO_WM_BEAUTIFY_FLAG" val=""/>
+</p:tagLst>
 </file>
 
-<file path=ppt/slides/slide8.xml><?xml version="1.0" encoding="utf-8"?>
-<p:sld xmlns:a="http://schemas.openxmlformats.org/drawingml/2006/main" xmlns:r="http://schemas.openxmlformats.org/officeDocument/2006/relationships" xmlns:p="http://schemas.openxmlformats.org/presentationml/2006/main">
-  <p:cSld>
-    <p:bg>
-      <p:bgPr>
-        <a:solidFill>
-          <a:schemeClr val="bg2"/>
-        </a:solidFill>
-        <a:effectLst/>
-      </p:bgPr>
-    </p:bg>
-    <p:spTree>
-      <p:nvGrpSpPr>
-        <p:cNvPr id="1" name=""/>
-        <p:cNvGrpSpPr/>
-        <p:nvPr/>
-      </p:nvGrpSpPr>
-      <p:grpSpPr>
-        <a:xfrm>
-          <a:off x="0" y="0"/>
-          <a:ext cx="0" cy="0"/>
-          <a:chOff x="0" y="0"/>
-          <a:chExt cx="0" cy="0"/>
-        </a:xfrm>
-      </p:grpSpPr>
-      <p:sp>
-        <p:nvSpPr>
-          <p:cNvPr id="2" name="Title 1">
-            <a:extLst>
-              <a:ext uri="{FF2B5EF4-FFF2-40B4-BE49-F238E27FC236}">
-                <a16:creationId xmlns:a16="http://schemas.microsoft.com/office/drawing/2014/main" id="{5B8D88AE-13EE-0391-3C70-94F854004867}"/>
-              </a:ext>
-            </a:extLst>
-          </p:cNvPr>
-          <p:cNvSpPr>
-            <a:spLocks noGrp="1"/>
-          </p:cNvSpPr>
-          <p:nvPr>
-            <p:ph type="title"/>
-          </p:nvPr>
-        </p:nvSpPr>
-        <p:spPr>
-          <a:xfrm>
-            <a:off x="965200" y="1218476"/>
-            <a:ext cx="3187318" cy="4421050"/>
-          </a:xfrm>
-          <a:effectLst/>
-        </p:spPr>
-        <p:txBody>
-          <a:bodyPr anchor="ctr">
-            <a:normAutofit/>
-          </a:bodyPr>
-          <a:lstStyle/>
-          <a:p>
-            <a:pPr algn="r"/>
-            <a:endParaRPr lang="en-US" sz="3200">
-              <a:solidFill>
-                <a:schemeClr val="tx1"/>
-              </a:solidFill>
-            </a:endParaRPr>
-          </a:p>
-        </p:txBody>
-      </p:sp>
-      <p:sp>
-        <p:nvSpPr>
-          <p:cNvPr id="3" name="Content Placeholder 2">
-            <a:extLst>
-              <a:ext uri="{FF2B5EF4-FFF2-40B4-BE49-F238E27FC236}">
-                <a16:creationId xmlns:a16="http://schemas.microsoft.com/office/drawing/2014/main" id="{5098C138-4C4C-14F8-F0B2-9F50DDE6B718}"/>
-              </a:ext>
-            </a:extLst>
-          </p:cNvPr>
-          <p:cNvSpPr>
-            <a:spLocks noGrp="1"/>
-          </p:cNvSpPr>
-          <p:nvPr>
-            <p:ph idx="1"/>
-          </p:nvPr>
-        </p:nvSpPr>
-        <p:spPr>
-          <a:xfrm>
-            <a:off x="5146751" y="1218475"/>
-            <a:ext cx="6080050" cy="4421051"/>
-          </a:xfrm>
-          <a:effectLst/>
-        </p:spPr>
-        <p:txBody>
-          <a:bodyPr>
-            <a:normAutofit/>
-          </a:bodyPr>
-          <a:lstStyle/>
-          <a:p>
-            <a:endParaRPr lang="en-US" sz="1600"/>
-          </a:p>
-        </p:txBody>
-      </p:sp>
-    </p:spTree>
-    <p:extLst>
-      <p:ext uri="{BB962C8B-B14F-4D97-AF65-F5344CB8AC3E}">
-        <p14:creationId xmlns:p14="http://schemas.microsoft.com/office/powerpoint/2010/main" val="1092437088"/>
-      </p:ext>
-    </p:extLst>
-  </p:cSld>
-  <p:clrMapOvr>
-    <a:masterClrMapping/>
-  </p:clrMapOvr>
-</p:sld>
+<file path=ppt/tags/tag2.xml><?xml version="1.0" encoding="utf-8"?>
+<p:tagLst xmlns:p="http://schemas.openxmlformats.org/presentationml/2006/main">
+  <p:tag name="KSO_WM_BEAUTIFY_FLAG" val=""/>
+</p:tagLst>
 </file>
 
-<file path=ppt/slides/slide9.xml><?xml version="1.0" encoding="utf-8"?>
-<p:sld xmlns:a="http://schemas.openxmlformats.org/drawingml/2006/main" xmlns:r="http://schemas.openxmlformats.org/officeDocument/2006/relationships" xmlns:p="http://schemas.openxmlformats.org/presentationml/2006/main">
-  <p:cSld>
-    <p:bg>
-      <p:bgPr>
-        <a:solidFill>
-          <a:schemeClr val="bg2"/>
-        </a:solidFill>
-        <a:effectLst/>
-      </p:bgPr>
-    </p:bg>
-    <p:spTree>
-      <p:nvGrpSpPr>
-        <p:cNvPr id="1" name=""/>
-        <p:cNvGrpSpPr/>
-        <p:nvPr/>
-      </p:nvGrpSpPr>
-      <p:grpSpPr>
-        <a:xfrm>
-          <a:off x="0" y="0"/>
-          <a:ext cx="0" cy="0"/>
-          <a:chOff x="0" y="0"/>
-          <a:chExt cx="0" cy="0"/>
-        </a:xfrm>
-      </p:grpSpPr>
-      <p:sp>
-        <p:nvSpPr>
-          <p:cNvPr id="2" name="Title 1">
-            <a:extLst>
-              <a:ext uri="{FF2B5EF4-FFF2-40B4-BE49-F238E27FC236}">
-                <a16:creationId xmlns:a16="http://schemas.microsoft.com/office/drawing/2014/main" id="{5B8D88AE-13EE-0391-3C70-94F854004867}"/>
-              </a:ext>
-            </a:extLst>
-          </p:cNvPr>
-          <p:cNvSpPr>
-            <a:spLocks noGrp="1"/>
-          </p:cNvSpPr>
-          <p:nvPr>
-            <p:ph type="title"/>
-          </p:nvPr>
-        </p:nvSpPr>
-        <p:spPr>
-          <a:xfrm>
-            <a:off x="965200" y="1218476"/>
-            <a:ext cx="3187318" cy="4421050"/>
-          </a:xfrm>
-          <a:effectLst/>
-        </p:spPr>
-        <p:txBody>
-          <a:bodyPr anchor="ctr">
-            <a:normAutofit/>
-          </a:bodyPr>
-          <a:lstStyle/>
-          <a:p>
-            <a:pPr algn="r"/>
-            <a:endParaRPr lang="en-US" sz="3200">
-              <a:solidFill>
-                <a:schemeClr val="tx1"/>
-              </a:solidFill>
-            </a:endParaRPr>
-          </a:p>
-        </p:txBody>
-      </p:sp>
-      <p:sp>
-        <p:nvSpPr>
-          <p:cNvPr id="3" name="Content Placeholder 2">
-            <a:extLst>
-              <a:ext uri="{FF2B5EF4-FFF2-40B4-BE49-F238E27FC236}">
-                <a16:creationId xmlns:a16="http://schemas.microsoft.com/office/drawing/2014/main" id="{5098C138-4C4C-14F8-F0B2-9F50DDE6B718}"/>
-              </a:ext>
-            </a:extLst>
-          </p:cNvPr>
-          <p:cNvSpPr>
-            <a:spLocks noGrp="1"/>
-          </p:cNvSpPr>
-          <p:nvPr>
-            <p:ph idx="1"/>
-          </p:nvPr>
-        </p:nvSpPr>
-        <p:spPr>
-          <a:xfrm>
-            <a:off x="5146751" y="1218475"/>
-            <a:ext cx="6080050" cy="4421051"/>
-          </a:xfrm>
-          <a:effectLst/>
-        </p:spPr>
-        <p:txBody>
-          <a:bodyPr>
-            <a:normAutofit/>
-          </a:bodyPr>
-          <a:lstStyle/>
-          <a:p>
-            <a:endParaRPr lang="en-US" sz="1600"/>
-          </a:p>
-        </p:txBody>
-      </p:sp>
-    </p:spTree>
-    <p:extLst>
-      <p:ext uri="{BB962C8B-B14F-4D97-AF65-F5344CB8AC3E}">
-        <p14:creationId xmlns:p14="http://schemas.microsoft.com/office/powerpoint/2010/main" val="1450756274"/>
-      </p:ext>
-    </p:extLst>
-  </p:cSld>
-  <p:clrMapOvr>
-    <a:masterClrMapping/>
-  </p:clrMapOvr>
-</p:sld>
+<file path=ppt/tags/tag3.xml><?xml version="1.0" encoding="utf-8"?>
+<p:tagLst xmlns:p="http://schemas.openxmlformats.org/presentationml/2006/main">
+  <p:tag name="KSO_WM_BEAUTIFY_FLAG" val=""/>
+</p:tagLst>
+</file>
+
+<file path=ppt/tags/tag4.xml><?xml version="1.0" encoding="utf-8"?>
+<p:tagLst xmlns:p="http://schemas.openxmlformats.org/presentationml/2006/main">
+  <p:tag name="KSO_WM_BEAUTIFY_FLAG" val=""/>
+</p:tagLst>
+</file>
+
+<file path=ppt/tags/tag5.xml><?xml version="1.0" encoding="utf-8"?>
+<p:tagLst xmlns:p="http://schemas.openxmlformats.org/presentationml/2006/main">
+  <p:tag name="KSO_WM_BEAUTIFY_FLAG" val=""/>
+</p:tagLst>
+</file>
+
+<file path=ppt/tags/tag6.xml><?xml version="1.0" encoding="utf-8"?>
+<p:tagLst xmlns:p="http://schemas.openxmlformats.org/presentationml/2006/main">
+  <p:tag name="KSO_WM_BEAUTIFY_FLAG" val=""/>
+</p:tagLst>
+</file>
+
+<file path=ppt/tags/tag7.xml><?xml version="1.0" encoding="utf-8"?>
+<p:tagLst xmlns:p="http://schemas.openxmlformats.org/presentationml/2006/main">
+  <p:tag name="KSO_WM_BEAUTIFY_FLAG" val=""/>
+</p:tagLst>
+</file>
+
+<file path=ppt/tags/tag8.xml><?xml version="1.0" encoding="utf-8"?>
+<p:tagLst xmlns:p="http://schemas.openxmlformats.org/presentationml/2006/main">
+  <p:tag name="KSO_WM_BEAUTIFY_FLAG" val=""/>
+</p:tagLst>
 </file>
 
 <file path=ppt/theme/theme1.xml><?xml version="1.0" encoding="utf-8"?>
@@ -7349,7 +6899,7 @@
     </a:clrScheme>
     <a:fontScheme name="Quotable">
       <a:majorFont>
-        <a:latin typeface="Century Gothic" panose="020B0502020202020204"/>
+        <a:latin typeface="Century Gothic"/>
         <a:ea typeface=""/>
         <a:cs typeface=""/>
         <a:font script="Jpan" typeface="ＭＳ ゴシック"/>
@@ -7384,7 +6934,7 @@
         <a:font script="Geor" typeface="Sylfaen"/>
       </a:majorFont>
       <a:minorFont>
-        <a:latin typeface="Century Gothic" panose="020B0502020202020204"/>
+        <a:latin typeface="Century Gothic"/>
         <a:ea typeface=""/>
         <a:cs typeface=""/>
         <a:font script="Jpan" typeface="ＭＳ ゴシック"/>
@@ -7533,11 +7083,9 @@
       </a:bgFillStyleLst>
     </a:fmtScheme>
   </a:themeElements>
-  <a:objectDefaults/>
-  <a:extraClrSchemeLst/>
   <a:extLst>
     <a:ext uri="{05A4C25C-085E-4340-85A3-A5531E510DB2}">
-      <thm15:themeFamily xmlns:thm15="http://schemas.microsoft.com/office/thememl/2012/main" name="Quotable" id="{39EC5628-30ED-4578-ACD8-9820EDB8E15A}" vid="{6F3559E9-1A4C-49D8-94D4-F41003531C49}"/>
+      <thm15:themeFamily xmlns:thm15="http://schemas.microsoft.com/office/thememl/2012/main" name="Office Theme" id="{62F939B6-93AF-4DB8-9C6B-D6C7DFDC589F}" vid="{4A3C46E8-61CC-4603-A589-7422A47A8E4A}"/>
     </a:ext>
   </a:extLst>
 </a:theme>
